--- a/docs/Z700F-L2产品培训手册.pptx
+++ b/docs/Z700F-L2产品培训手册.pptx
@@ -18,7 +18,6 @@
     <p:sldId id="266" r:id="rId17"/>
     <p:sldId id="267" r:id="rId18"/>
     <p:sldId id="268" r:id="rId19"/>
-    <p:sldId id="269" r:id="rId20"/>
   </p:sldIdLst>
   <p:sldSz cx="12191695" cy="6858000" type="screen4x3"/>
   <p:notesSz cx="6858000" cy="9144000"/>
@@ -3103,14 +3102,57 @@
       <p:grpSpPr/>
       <p:sp>
         <p:nvSpPr>
-          <p:cNvPr id="2" name="TextBox 1"/>
+          <p:cNvPr id="2" name="Rectangle 1"/>
+          <p:cNvSpPr/>
+          <p:nvPr/>
+        </p:nvSpPr>
+        <p:spPr>
+          <a:xfrm>
+            <a:off x="0" y="0"/>
+            <a:ext cx="12191695" cy="594360"/>
+          </a:xfrm>
+          <a:prstGeom prst="rect">
+            <a:avLst/>
+          </a:prstGeom>
+          <a:solidFill>
+            <a:srgbClr val="1F497D"/>
+          </a:solidFill>
+          <a:ln>
+            <a:noFill/>
+          </a:ln>
+        </p:spPr>
+        <p:style>
+          <a:lnRef idx="1">
+            <a:schemeClr val="accent1"/>
+          </a:lnRef>
+          <a:fillRef idx="3">
+            <a:schemeClr val="accent1"/>
+          </a:fillRef>
+          <a:effectRef idx="2">
+            <a:schemeClr val="accent1"/>
+          </a:effectRef>
+          <a:fontRef idx="minor">
+            <a:schemeClr val="lt1"/>
+          </a:fontRef>
+        </p:style>
+        <p:txBody>
+          <a:bodyPr rtlCol="0" anchor="ctr"/>
+          <a:lstStyle/>
+          <a:p>
+            <a:pPr algn="ctr"/>
+          </a:p>
+        </p:txBody>
+      </p:sp>
+      <p:sp>
+        <p:nvSpPr>
+          <p:cNvPr id="3" name="TextBox 2"/>
           <p:cNvSpPr txBox="1"/>
           <p:nvPr/>
         </p:nvSpPr>
         <p:spPr>
           <a:xfrm>
-            <a:off x="914400" y="1645920"/>
-            <a:ext cx="10332720" cy="1371600"/>
+            <a:off x="457200" y="45720"/>
+            <a:ext cx="10972800" cy="502920"/>
           </a:xfrm>
           <a:prstGeom prst="rect">
             <a:avLst/>
@@ -3124,28 +3166,32 @@
           <a:lstStyle/>
           <a:p>
             <a:pPr>
-              <a:defRPr sz="3600" b="1">
-                <a:solidFill>
-                  <a:srgbClr val="1F497D"/>
+              <a:defRPr sz="2400" b="1">
+                <a:solidFill>
+                  <a:srgbClr val="FFFFFF"/>
                 </a:solidFill>
               </a:defRPr>
             </a:pPr>
             <a:r>
               <a:t>Z700 F · L2 精细操作机器人</a:t>
             </a:r>
-          </a:p>
-        </p:txBody>
-      </p:sp>
-      <p:sp>
-        <p:nvSpPr>
-          <p:cNvPr id="3" name="TextBox 2"/>
+            <a:br/>
+            <a:r>
+              <a:t>完整产品手册</a:t>
+            </a:r>
+          </a:p>
+        </p:txBody>
+      </p:sp>
+      <p:sp>
+        <p:nvSpPr>
+          <p:cNvPr id="4" name="TextBox 3"/>
           <p:cNvSpPr txBox="1"/>
           <p:nvPr/>
         </p:nvSpPr>
         <p:spPr>
           <a:xfrm>
-            <a:off x="914400" y="3291840"/>
-            <a:ext cx="10332720" cy="914400"/>
+            <a:off x="457200" y="914400"/>
+            <a:ext cx="10972800" cy="5669280"/>
           </a:xfrm>
           <a:prstGeom prst="rect">
             <a:avLst/>
@@ -3153,15 +3199,18 @@
           <a:noFill/>
         </p:spPr>
         <p:txBody>
-          <a:bodyPr wrap="none">
+          <a:bodyPr wrap="square">
             <a:spAutoFit/>
           </a:bodyPr>
           <a:lstStyle/>
           <a:p>
             <a:pPr>
-              <a:defRPr sz="2400">
-                <a:solidFill>
-                  <a:srgbClr val="4F81BD"/>
+              <a:spcAft>
+                <a:spcPts val="300"/>
+              </a:spcAft>
+              <a:defRPr sz="2000">
+                <a:solidFill>
+                  <a:srgbClr val="333333"/>
                 </a:solidFill>
               </a:defRPr>
             </a:pPr>
@@ -3169,39 +3218,19 @@
               <a:t>固定式精密操作具身机器人 · 精密制造智能技工</a:t>
             </a:r>
           </a:p>
-        </p:txBody>
-      </p:sp>
-      <p:sp>
-        <p:nvSpPr>
-          <p:cNvPr id="4" name="TextBox 3"/>
-          <p:cNvSpPr txBox="1"/>
-          <p:nvPr/>
-        </p:nvSpPr>
-        <p:spPr>
-          <a:xfrm>
-            <a:off x="914400" y="4754880"/>
-            <a:ext cx="10332720" cy="457200"/>
-          </a:xfrm>
-          <a:prstGeom prst="rect">
-            <a:avLst/>
-          </a:prstGeom>
-          <a:noFill/>
-        </p:spPr>
-        <p:txBody>
-          <a:bodyPr wrap="none">
-            <a:spAutoFit/>
-          </a:bodyPr>
-          <a:lstStyle/>
-          <a:p>
-            <a:pPr>
-              <a:defRPr sz="1400">
-                <a:solidFill>
-                  <a:srgbClr val="888888"/>
-                </a:solidFill>
-              </a:defRPr>
-            </a:pPr>
-            <a:r>
-              <a:t>Z-MAX 智能化模型引擎 · 智蜂创元(ZFCY) · Q/ZFCY 001.1-2026</a:t>
+          <a:p>
+            <a:pPr>
+              <a:spcAft>
+                <a:spcPts val="300"/>
+              </a:spcAft>
+              <a:defRPr sz="2000">
+                <a:solidFill>
+                  <a:srgbClr val="333333"/>
+                </a:solidFill>
+              </a:defRPr>
+            </a:pPr>
+            <a:r>
+              <a:t>Z-MAX 智能化模型引擎 · Q/ZFCY 001.1-2026</a:t>
             </a:r>
           </a:p>
         </p:txBody>
@@ -3233,7 +3262,7 @@
         <p:spPr>
           <a:xfrm>
             <a:off x="0" y="0"/>
-            <a:ext cx="12191695" cy="640080"/>
+            <a:ext cx="12191695" cy="594360"/>
           </a:xfrm>
           <a:prstGeom prst="rect">
             <a:avLst/>
@@ -3276,7 +3305,7 @@
         <p:spPr>
           <a:xfrm>
             <a:off x="457200" y="45720"/>
-            <a:ext cx="10972800" cy="548640"/>
+            <a:ext cx="10972800" cy="502920"/>
           </a:xfrm>
           <a:prstGeom prst="rect">
             <a:avLst/>
@@ -3290,14 +3319,14 @@
           <a:lstStyle/>
           <a:p>
             <a:pPr>
-              <a:defRPr sz="2600" b="1">
+              <a:defRPr sz="2400" b="1">
                 <a:solidFill>
                   <a:srgbClr val="FFFFFF"/>
                 </a:solidFill>
               </a:defRPr>
             </a:pPr>
             <a:r>
-              <a:t>产品迭代路线 · 硬件一步到位 · 软件持续升级</a:t>
+              <a:t>产品迭代路线</a:t>
             </a:r>
           </a:p>
         </p:txBody>
@@ -3310,8 +3339,8 @@
         </p:nvSpPr>
         <p:spPr>
           <a:xfrm>
-            <a:off x="457200" y="1005840"/>
-            <a:ext cx="10972800" cy="5486400"/>
+            <a:off x="457200" y="914400"/>
+            <a:ext cx="10972800" cy="5669280"/>
           </a:xfrm>
           <a:prstGeom prst="rect">
             <a:avLst/>
@@ -3326,7 +3355,7 @@
           <a:p>
             <a:pPr>
               <a:spcAft>
-                <a:spcPts val="400"/>
+                <a:spcPts val="300"/>
               </a:spcAft>
               <a:defRPr sz="1500">
                 <a:solidFill>
@@ -3335,13 +3364,13 @@
               </a:defRPr>
             </a:pPr>
             <a:r>
-              <a:t>┌──────┬──────────────────────┬──────────┬──────────┐</a:t>
-            </a:r>
-          </a:p>
-          <a:p>
-            <a:pPr>
-              <a:spcAft>
-                <a:spcPts val="400"/>
+              <a:t>L2✅ 基线·Sys-0分段式·人工编排+AOI·≥99.2%·已交付</a:t>
+            </a:r>
+          </a:p>
+          <a:p>
+            <a:pPr>
+              <a:spcAft>
+                <a:spcPts val="300"/>
               </a:spcAft>
               <a:defRPr sz="1500">
                 <a:solidFill>
@@ -3350,13 +3379,13 @@
               </a:defRPr>
             </a:pPr>
             <a:r>
-              <a:t>│ 等级  │ 核心能力              │ 良率      │ 时间      │</a:t>
-            </a:r>
-          </a:p>
-          <a:p>
-            <a:pPr>
-              <a:spcAft>
-                <a:spcPts val="400"/>
+              <a:t>L3⏳ 增强·Sys-1端到端·多模态自主闭环·≥99.5%·Q4OTA</a:t>
+            </a:r>
+          </a:p>
+          <a:p>
+            <a:pPr>
+              <a:spcAft>
+                <a:spcPts val="300"/>
               </a:spcAft>
               <a:defRPr sz="1500">
                 <a:solidFill>
@@ -3365,13 +3394,13 @@
               </a:defRPr>
             </a:pPr>
             <a:r>
-              <a:t>├──────┼──────────────────────┼──────────┼──────────┤</a:t>
-            </a:r>
-          </a:p>
-          <a:p>
-            <a:pPr>
-              <a:spcAft>
-                <a:spcPts val="400"/>
+              <a:t>L4🔮 旗舰·Sys-11智能·精细感知全自主·≥99.9%·Q2OTA</a:t>
+            </a:r>
+          </a:p>
+          <a:p>
+            <a:pPr>
+              <a:spcAft>
+                <a:spcPts val="300"/>
               </a:spcAft>
               <a:defRPr sz="1500">
                 <a:solidFill>
@@ -3379,14 +3408,11 @@
                 </a:solidFill>
               </a:defRPr>
             </a:pPr>
-            <a:r>
-              <a:t>│ L2 ✅ │ 基线版 · 人工编排     │ ≥99.2%   │ 已交付    │</a:t>
-            </a:r>
-          </a:p>
-          <a:p>
-            <a:pPr>
-              <a:spcAft>
-                <a:spcPts val="400"/>
+          </a:p>
+          <a:p>
+            <a:pPr>
+              <a:spcAft>
+                <a:spcPts val="300"/>
               </a:spcAft>
               <a:defRPr sz="1500">
                 <a:solidFill>
@@ -3395,139 +3421,7 @@
               </a:defRPr>
             </a:pPr>
             <a:r>
-              <a:t>│      │ 原子功能库 · 分段验证  │          │          │</a:t>
-            </a:r>
-          </a:p>
-          <a:p>
-            <a:pPr>
-              <a:spcAft>
-                <a:spcPts val="400"/>
-              </a:spcAft>
-              <a:defRPr sz="1500">
-                <a:solidFill>
-                  <a:srgbClr val="333333"/>
-                </a:solidFill>
-              </a:defRPr>
-            </a:pPr>
-            <a:r>
-              <a:t>├──────┼──────────────────────┼──────────┼──────────┤</a:t>
-            </a:r>
-          </a:p>
-          <a:p>
-            <a:pPr>
-              <a:spcAft>
-                <a:spcPts val="400"/>
-              </a:spcAft>
-              <a:defRPr sz="1500">
-                <a:solidFill>
-                  <a:srgbClr val="333333"/>
-                </a:solidFill>
-              </a:defRPr>
-            </a:pPr>
-            <a:r>
-              <a:t>│ L3 ⏳ │ 增强版 · 多模态端到端 │ ≥99.5%   │ 2026 Q4  │</a:t>
-            </a:r>
-          </a:p>
-          <a:p>
-            <a:pPr>
-              <a:spcAft>
-                <a:spcPts val="400"/>
-              </a:spcAft>
-              <a:defRPr sz="1500">
-                <a:solidFill>
-                  <a:srgbClr val="333333"/>
-                </a:solidFill>
-              </a:defRPr>
-            </a:pPr>
-            <a:r>
-              <a:t>│      │ 自主识别 · 换线换配方  │          │ OTA升级  │</a:t>
-            </a:r>
-          </a:p>
-          <a:p>
-            <a:pPr>
-              <a:spcAft>
-                <a:spcPts val="400"/>
-              </a:spcAft>
-              <a:defRPr sz="1500">
-                <a:solidFill>
-                  <a:srgbClr val="333333"/>
-                </a:solidFill>
-              </a:defRPr>
-            </a:pPr>
-            <a:r>
-              <a:t>├──────┼──────────────────────┼──────────┼──────────┤</a:t>
-            </a:r>
-          </a:p>
-          <a:p>
-            <a:pPr>
-              <a:spcAft>
-                <a:spcPts val="400"/>
-              </a:spcAft>
-              <a:defRPr sz="1500">
-                <a:solidFill>
-                  <a:srgbClr val="333333"/>
-                </a:solidFill>
-              </a:defRPr>
-            </a:pPr>
-            <a:r>
-              <a:t>│ L4 🔮 │ 旗舰版 · 精细感知     │ ≥99.9%   │ 2027 Q2  │</a:t>
-            </a:r>
-          </a:p>
-          <a:p>
-            <a:pPr>
-              <a:spcAft>
-                <a:spcPts val="400"/>
-              </a:spcAft>
-              <a:defRPr sz="1500">
-                <a:solidFill>
-                  <a:srgbClr val="333333"/>
-                </a:solidFill>
-              </a:defRPr>
-            </a:pPr>
-            <a:r>
-              <a:t>│      │ 场景引导 · 全自主      │          │ OTA升级  │</a:t>
-            </a:r>
-          </a:p>
-          <a:p>
-            <a:pPr>
-              <a:spcAft>
-                <a:spcPts val="400"/>
-              </a:spcAft>
-              <a:defRPr sz="1500">
-                <a:solidFill>
-                  <a:srgbClr val="333333"/>
-                </a:solidFill>
-              </a:defRPr>
-            </a:pPr>
-            <a:r>
-              <a:t>└──────┴──────────────────────┴──────────┴──────────┘</a:t>
-            </a:r>
-          </a:p>
-          <a:p>
-            <a:pPr>
-              <a:spcAft>
-                <a:spcPts val="400"/>
-              </a:spcAft>
-              <a:defRPr sz="1500">
-                <a:solidFill>
-                  <a:srgbClr val="333333"/>
-                </a:solidFill>
-              </a:defRPr>
-            </a:pPr>
-          </a:p>
-          <a:p>
-            <a:pPr>
-              <a:spcAft>
-                <a:spcPts val="400"/>
-              </a:spcAft>
-              <a:defRPr sz="1500">
-                <a:solidFill>
-                  <a:srgbClr val="333333"/>
-                </a:solidFill>
-              </a:defRPr>
-            </a:pPr>
-            <a:r>
-              <a:t>硬件一步到位 · 软件持续升级 · 无需更换设备</a:t>
+              <a:t>硬件一步到位·软件OTA升级·无需更换设备</a:t>
             </a:r>
           </a:p>
         </p:txBody>
@@ -3559,7 +3453,7 @@
         <p:spPr>
           <a:xfrm>
             <a:off x="0" y="0"/>
-            <a:ext cx="12191695" cy="640080"/>
+            <a:ext cx="12191695" cy="594360"/>
           </a:xfrm>
           <a:prstGeom prst="rect">
             <a:avLst/>
@@ -3602,7 +3496,7 @@
         <p:spPr>
           <a:xfrm>
             <a:off x="457200" y="45720"/>
-            <a:ext cx="10972800" cy="548640"/>
+            <a:ext cx="10972800" cy="502920"/>
           </a:xfrm>
           <a:prstGeom prst="rect">
             <a:avLst/>
@@ -3616,14 +3510,14 @@
           <a:lstStyle/>
           <a:p>
             <a:pPr>
-              <a:defRPr sz="2600" b="1">
+              <a:defRPr sz="2400" b="1">
                 <a:solidFill>
                   <a:srgbClr val="FFFFFF"/>
                 </a:solidFill>
               </a:defRPr>
             </a:pPr>
             <a:r>
-              <a:t>安全体系 · 五层主动保护</a:t>
+              <a:t>投资回报·12个月回本</a:t>
             </a:r>
           </a:p>
         </p:txBody>
@@ -3636,8 +3530,8 @@
         </p:nvSpPr>
         <p:spPr>
           <a:xfrm>
-            <a:off x="457200" y="1005840"/>
-            <a:ext cx="10972800" cy="5486400"/>
+            <a:off x="457200" y="914400"/>
+            <a:ext cx="10972800" cy="5669280"/>
           </a:xfrm>
           <a:prstGeom prst="rect">
             <a:avLst/>
@@ -3652,103 +3546,61 @@
           <a:p>
             <a:pPr>
               <a:spcAft>
-                <a:spcPts val="400"/>
-              </a:spcAft>
-              <a:defRPr sz="1500">
-                <a:solidFill>
-                  <a:srgbClr val="333333"/>
-                </a:solidFill>
-              </a:defRPr>
-            </a:pPr>
-            <a:r>
-              <a:t>L1  力控预判    力传感器 &gt;10kHz 采样 → 接触力超阈值 0.05s 内停机</a:t>
-            </a:r>
-          </a:p>
-          <a:p>
-            <a:pPr>
-              <a:spcAft>
-                <a:spcPts val="400"/>
-              </a:spcAft>
-              <a:defRPr sz="1500">
-                <a:solidFill>
-                  <a:srgbClr val="333333"/>
-                </a:solidFill>
-              </a:defRPr>
-            </a:pPr>
-            <a:r>
-              <a:t>L2  触觉闭环    TS-T-15 实时反馈 → 夹持力 &gt;2N 自动释放</a:t>
-            </a:r>
-          </a:p>
-          <a:p>
-            <a:pPr>
-              <a:spcAft>
-                <a:spcPts val="400"/>
-              </a:spcAft>
-              <a:defRPr sz="1500">
-                <a:solidFill>
-                  <a:srgbClr val="333333"/>
-                </a:solidFill>
-              </a:defRPr>
-            </a:pPr>
-            <a:r>
-              <a:t>L3  光幕联动    安全光栅检测人员进入 → 自动降速 / 分区停机</a:t>
-            </a:r>
-          </a:p>
-          <a:p>
-            <a:pPr>
-              <a:spcAft>
-                <a:spcPts val="400"/>
-              </a:spcAft>
-              <a:defRPr sz="1500">
-                <a:solidFill>
-                  <a:srgbClr val="333333"/>
-                </a:solidFill>
-              </a:defRPr>
-            </a:pPr>
-            <a:r>
-              <a:t>L4  双路急停    物理按钮 / USB 外接任一触发 → 立即停止所有运动</a:t>
-            </a:r>
-          </a:p>
-          <a:p>
-            <a:pPr>
-              <a:spcAft>
-                <a:spcPts val="400"/>
-              </a:spcAft>
-              <a:defRPr sz="1500">
-                <a:solidFill>
-                  <a:srgbClr val="333333"/>
-                </a:solidFill>
-              </a:defRPr>
-            </a:pPr>
-            <a:r>
-              <a:t>L5  塔灯指示    🟢绿=正常运行  🟡黄=待处理  🔴红=急停</a:t>
-            </a:r>
-          </a:p>
-          <a:p>
-            <a:pPr>
-              <a:spcAft>
-                <a:spcPts val="400"/>
-              </a:spcAft>
-              <a:defRPr sz="1500">
-                <a:solidFill>
-                  <a:srgbClr val="333333"/>
-                </a:solidFill>
-              </a:defRPr>
-            </a:pPr>
-          </a:p>
-          <a:p>
-            <a:pPr>
-              <a:spcAft>
-                <a:spcPts val="400"/>
-              </a:spcAft>
-              <a:defRPr sz="1500">
-                <a:solidFill>
-                  <a:srgbClr val="333333"/>
-                </a:solidFill>
-              </a:defRPr>
-            </a:pPr>
-            <a:r>
-              <a:t>Z700 F 符合工业安全标准 · 双路冗余设计 · 力控过载保护</a:t>
+                <a:spcPts val="300"/>
+              </a:spcAft>
+              <a:defRPr sz="1600">
+                <a:solidFill>
+                  <a:srgbClr val="333333"/>
+                </a:solidFill>
+              </a:defRPr>
+            </a:pPr>
+            <a:r>
+              <a:t>熟练工人(3班):年120万 vs Z700F:年25万</a:t>
+            </a:r>
+          </a:p>
+          <a:p>
+            <a:pPr>
+              <a:spcAft>
+                <a:spcPts val="300"/>
+              </a:spcAft>
+              <a:defRPr sz="1600">
+                <a:solidFill>
+                  <a:srgbClr val="333333"/>
+                </a:solidFill>
+              </a:defRPr>
+            </a:pPr>
+            <a:r>
+              <a:t>关键工序良率:95%→≥99.2%</a:t>
+            </a:r>
+          </a:p>
+          <a:p>
+            <a:pPr>
+              <a:spcAft>
+                <a:spcPts val="300"/>
+              </a:spcAft>
+              <a:defRPr sz="1600">
+                <a:solidFill>
+                  <a:srgbClr val="333333"/>
+                </a:solidFill>
+              </a:defRPr>
+            </a:pPr>
+            <a:r>
+              <a:t>单模块节拍:45-60s→38s</a:t>
+            </a:r>
+          </a:p>
+          <a:p>
+            <a:pPr>
+              <a:spcAft>
+                <a:spcPts val="300"/>
+              </a:spcAft>
+              <a:defRPr sz="1600">
+                <a:solidFill>
+                  <a:srgbClr val="333333"/>
+                </a:solidFill>
+              </a:defRPr>
+            </a:pPr>
+            <a:r>
+              <a:t>年节省:95万+</a:t>
             </a:r>
           </a:p>
         </p:txBody>
@@ -3780,7 +3632,7 @@
         <p:spPr>
           <a:xfrm>
             <a:off x="0" y="0"/>
-            <a:ext cx="12191695" cy="640080"/>
+            <a:ext cx="12191695" cy="594360"/>
           </a:xfrm>
           <a:prstGeom prst="rect">
             <a:avLst/>
@@ -3823,7 +3675,7 @@
         <p:spPr>
           <a:xfrm>
             <a:off x="457200" y="45720"/>
-            <a:ext cx="10972800" cy="548640"/>
+            <a:ext cx="10972800" cy="502920"/>
           </a:xfrm>
           <a:prstGeom prst="rect">
             <a:avLst/>
@@ -3837,14 +3689,14 @@
           <a:lstStyle/>
           <a:p>
             <a:pPr>
-              <a:defRPr sz="2600" b="1">
+              <a:defRPr sz="2400" b="1">
                 <a:solidFill>
                   <a:srgbClr val="FFFFFF"/>
                 </a:solidFill>
               </a:defRPr>
             </a:pPr>
             <a:r>
-              <a:t>日常操作 · 5分钟学会</a:t>
+              <a:t>技术参数</a:t>
             </a:r>
           </a:p>
         </p:txBody>
@@ -3857,8 +3709,8 @@
         </p:nvSpPr>
         <p:spPr>
           <a:xfrm>
-            <a:off x="457200" y="1005840"/>
-            <a:ext cx="10972800" cy="5486400"/>
+            <a:off x="457200" y="914400"/>
+            <a:ext cx="10972800" cy="5669280"/>
           </a:xfrm>
           <a:prstGeom prst="rect">
             <a:avLst/>
@@ -3873,157 +3725,91 @@
           <a:p>
             <a:pPr>
               <a:spcAft>
-                <a:spcPts val="400"/>
-              </a:spcAft>
-              <a:defRPr sz="1500">
-                <a:solidFill>
-                  <a:srgbClr val="333333"/>
-                </a:solidFill>
-              </a:defRPr>
-            </a:pPr>
-            <a:r>
-              <a:t>开机:  按电源 → 等绿灯亮 → 打开 XSpace Studio</a:t>
-            </a:r>
-          </a:p>
-          <a:p>
-            <a:pPr>
-              <a:spcAft>
-                <a:spcPts val="400"/>
-              </a:spcAft>
-              <a:defRPr sz="1500">
-                <a:solidFill>
-                  <a:srgbClr val="333333"/>
-                </a:solidFill>
-              </a:defRPr>
-            </a:pPr>
-            <a:r>
-              <a:t>运行:  选工序(固件加载/老化上下料/模块测试) → 点「开始」→ 自动执行</a:t>
-            </a:r>
-          </a:p>
-          <a:p>
-            <a:pPr>
-              <a:spcAft>
-                <a:spcPts val="400"/>
-              </a:spcAft>
-              <a:defRPr sz="1500">
-                <a:solidFill>
-                  <a:srgbClr val="333333"/>
-                </a:solidFill>
-              </a:defRPr>
-            </a:pPr>
-          </a:p>
-          <a:p>
-            <a:pPr>
-              <a:spcAft>
-                <a:spcPts val="400"/>
-              </a:spcAft>
-              <a:defRPr sz="1500">
-                <a:solidFill>
-                  <a:srgbClr val="333333"/>
-                </a:solidFill>
-              </a:defRPr>
-            </a:pPr>
-            <a:r>
-              <a:t>常见问题:</a:t>
-            </a:r>
-          </a:p>
-          <a:p>
-            <a:pPr>
-              <a:spcAft>
-                <a:spcPts val="400"/>
-              </a:spcAft>
-              <a:defRPr sz="1500">
-                <a:solidFill>
-                  <a:srgbClr val="333333"/>
-                </a:solidFill>
-              </a:defRPr>
-            </a:pPr>
-          </a:p>
-          <a:p>
-            <a:pPr>
-              <a:spcAft>
-                <a:spcPts val="400"/>
-              </a:spcAft>
-              <a:defRPr sz="1500">
-                <a:solidFill>
-                  <a:srgbClr val="333333"/>
-                </a:solidFill>
-              </a:defRPr>
-            </a:pPr>
-            <a:r>
-              <a:t>黄灯亮  →  检查缺料 → 补充模块 → 点「继续」</a:t>
-            </a:r>
-          </a:p>
-          <a:p>
-            <a:pPr>
-              <a:spcAft>
-                <a:spcPts val="400"/>
-              </a:spcAft>
-              <a:defRPr sz="1500">
-                <a:solidFill>
-                  <a:srgbClr val="333333"/>
-                </a:solidFill>
-              </a:defRPr>
-            </a:pPr>
-            <a:r>
-              <a:t>夹爪抓不住 →  点「重新定位」</a:t>
-            </a:r>
-          </a:p>
-          <a:p>
-            <a:pPr>
-              <a:spcAft>
-                <a:spcPts val="400"/>
-              </a:spcAft>
-              <a:defRPr sz="1500">
-                <a:solidFill>
-                  <a:srgbClr val="333333"/>
-                </a:solidFill>
-              </a:defRPr>
-            </a:pPr>
-            <a:r>
-              <a:t>红灯亮  →  排除障碍 → 拧开急停 → 点「复位」</a:t>
-            </a:r>
-          </a:p>
-          <a:p>
-            <a:pPr>
-              <a:spcAft>
-                <a:spcPts val="400"/>
-              </a:spcAft>
-              <a:defRPr sz="1500">
-                <a:solidFill>
-                  <a:srgbClr val="333333"/>
-                </a:solidFill>
-              </a:defRPr>
-            </a:pPr>
-            <a:r>
-              <a:t>测试不通过 →  模块放入不良品盒 → 继续下一个</a:t>
-            </a:r>
-          </a:p>
-          <a:p>
-            <a:pPr>
-              <a:spcAft>
-                <a:spcPts val="400"/>
-              </a:spcAft>
-              <a:defRPr sz="1500">
-                <a:solidFill>
-                  <a:srgbClr val="333333"/>
-                </a:solidFill>
-              </a:defRPr>
-            </a:pPr>
-          </a:p>
-          <a:p>
-            <a:pPr>
-              <a:spcAft>
-                <a:spcPts val="400"/>
-              </a:spcAft>
-              <a:defRPr sz="1500">
-                <a:solidFill>
-                  <a:srgbClr val="333333"/>
-                </a:solidFill>
-              </a:defRPr>
-            </a:pPr>
-            <a:r>
-              <a:t>会玩手机就会操作 Z700 F  |  全中文界面  |  一键式操作</a:t>
+                <a:spcPts val="300"/>
+              </a:spcAft>
+              <a:defRPr sz="1300">
+                <a:solidFill>
+                  <a:srgbClr val="333333"/>
+                </a:solidFill>
+              </a:defRPr>
+            </a:pPr>
+            <a:r>
+              <a:t>Z700F(Fix固定版)·6轴·5kg·911mm·±0.05mm</a:t>
+            </a:r>
+          </a:p>
+          <a:p>
+            <a:pPr>
+              <a:spcAft>
+                <a:spcPts val="300"/>
+              </a:spcAft>
+              <a:defRPr sz="1300">
+                <a:solidFill>
+                  <a:srgbClr val="333333"/>
+                </a:solidFill>
+              </a:defRPr>
+            </a:pPr>
+            <a:r>
+              <a:t>力传感器六维&gt;10kHz·双3D相机·伺服夹爪0-40mm</a:t>
+            </a:r>
+          </a:p>
+          <a:p>
+            <a:pPr>
+              <a:spcAft>
+                <a:spcPts val="300"/>
+              </a:spcAft>
+              <a:defRPr sz="1300">
+                <a:solidFill>
+                  <a:srgbClr val="333333"/>
+                </a:solidFill>
+              </a:defRPr>
+            </a:pPr>
+            <a:r>
+              <a:t>AGX Orin NX 16G·ROS2 Humble Domain23</a:t>
+            </a:r>
+          </a:p>
+          <a:p>
+            <a:pPr>
+              <a:spcAft>
+                <a:spcPts val="300"/>
+              </a:spcAft>
+              <a:defRPr sz="1300">
+                <a:solidFill>
+                  <a:srgbClr val="333333"/>
+                </a:solidFill>
+              </a:defRPr>
+            </a:pPr>
+            <a:r>
+              <a:t>21节点·51Topic·XSpace Studio</a:t>
+            </a:r>
+          </a:p>
+          <a:p>
+            <a:pPr>
+              <a:spcAft>
+                <a:spcPts val="300"/>
+              </a:spcAft>
+              <a:defRPr sz="1300">
+                <a:solidFill>
+                  <a:srgbClr val="333333"/>
+                </a:solidFill>
+              </a:defRPr>
+            </a:pPr>
+            <a:r>
+              <a:t>双路急停·力控过载·光栅·塔灯·220VAC</a:t>
+            </a:r>
+          </a:p>
+          <a:p>
+            <a:pPr>
+              <a:spcAft>
+                <a:spcPts val="300"/>
+              </a:spcAft>
+              <a:defRPr sz="1300">
+                <a:solidFill>
+                  <a:srgbClr val="333333"/>
+                </a:solidFill>
+              </a:defRPr>
+            </a:pPr>
+            <a:r>
+              <a:t>关键工序良率≥99.2%·整机2年保修</a:t>
             </a:r>
           </a:p>
         </p:txBody>
@@ -4055,7 +3841,7 @@
         <p:spPr>
           <a:xfrm>
             <a:off x="0" y="0"/>
-            <a:ext cx="12191695" cy="640080"/>
+            <a:ext cx="12191695" cy="594360"/>
           </a:xfrm>
           <a:prstGeom prst="rect">
             <a:avLst/>
@@ -4098,7 +3884,7 @@
         <p:spPr>
           <a:xfrm>
             <a:off x="457200" y="45720"/>
-            <a:ext cx="10972800" cy="548640"/>
+            <a:ext cx="10972800" cy="502920"/>
           </a:xfrm>
           <a:prstGeom prst="rect">
             <a:avLst/>
@@ -4112,14 +3898,14 @@
           <a:lstStyle/>
           <a:p>
             <a:pPr>
-              <a:defRPr sz="2600" b="1">
+              <a:defRPr sz="2400" b="1">
                 <a:solidFill>
                   <a:srgbClr val="FFFFFF"/>
                 </a:solidFill>
               </a:defRPr>
             </a:pPr>
             <a:r>
-              <a:t>技术参数</a:t>
+              <a:t>Z700 F · 今日即可投产</a:t>
             </a:r>
           </a:p>
         </p:txBody>
@@ -4132,8 +3918,8 @@
         </p:nvSpPr>
         <p:spPr>
           <a:xfrm>
-            <a:off x="457200" y="1005840"/>
-            <a:ext cx="10972800" cy="5486400"/>
+            <a:off x="457200" y="914400"/>
+            <a:ext cx="10972800" cy="5669280"/>
           </a:xfrm>
           <a:prstGeom prst="rect">
             <a:avLst/>
@@ -4148,364 +3934,46 @@
           <a:p>
             <a:pPr>
               <a:spcAft>
-                <a:spcPts val="400"/>
-              </a:spcAft>
-              <a:defRPr sz="1100">
-                <a:solidFill>
-                  <a:srgbClr val="333333"/>
-                </a:solidFill>
-              </a:defRPr>
-            </a:pPr>
-            <a:r>
-              <a:t>┌─────────────────┬────────────────────────────────────┐</a:t>
-            </a:r>
-          </a:p>
-          <a:p>
-            <a:pPr>
-              <a:spcAft>
-                <a:spcPts val="400"/>
-              </a:spcAft>
-              <a:defRPr sz="1100">
-                <a:solidFill>
-                  <a:srgbClr val="333333"/>
-                </a:solidFill>
-              </a:defRPr>
-            </a:pPr>
-            <a:r>
-              <a:t>│ 产品型号         │ Z700 F (Fix 固定版)               │</a:t>
-            </a:r>
-          </a:p>
-          <a:p>
-            <a:pPr>
-              <a:spcAft>
-                <a:spcPts val="400"/>
-              </a:spcAft>
-              <a:defRPr sz="1100">
-                <a:solidFill>
-                  <a:srgbClr val="333333"/>
-                </a:solidFill>
-              </a:defRPr>
-            </a:pPr>
-            <a:r>
-              <a:t>│ 机械臂           │ 6轴协作型 · 负载5kg · 臂展911mm    │</a:t>
-            </a:r>
-          </a:p>
-          <a:p>
-            <a:pPr>
-              <a:spcAft>
-                <a:spcPts val="400"/>
-              </a:spcAft>
-              <a:defRPr sz="1100">
-                <a:solidFill>
-                  <a:srgbClr val="333333"/>
-                </a:solidFill>
-              </a:defRPr>
-            </a:pPr>
-            <a:r>
-              <a:t>│ 重复定位精度     │ ±0.05mm                           │</a:t>
-            </a:r>
-          </a:p>
-          <a:p>
-            <a:pPr>
-              <a:spcAft>
-                <a:spcPts val="400"/>
-              </a:spcAft>
-              <a:defRPr sz="1100">
-                <a:solidFill>
-                  <a:srgbClr val="333333"/>
-                </a:solidFill>
-              </a:defRPr>
-            </a:pPr>
-            <a:r>
-              <a:t>│ 力传感器         │ 六维 · 采样率 &gt;10kHz               │</a:t>
-            </a:r>
-          </a:p>
-          <a:p>
-            <a:pPr>
-              <a:spcAft>
-                <a:spcPts val="400"/>
-              </a:spcAft>
-              <a:defRPr sz="1100">
-                <a:solidFill>
-                  <a:srgbClr val="333333"/>
-                </a:solidFill>
-              </a:defRPr>
-            </a:pPr>
-            <a:r>
-              <a:t>│ 深度相机         │ 双3D (结构光 + RealSense D405)     │</a:t>
-            </a:r>
-          </a:p>
-          <a:p>
-            <a:pPr>
-              <a:spcAft>
-                <a:spcPts val="400"/>
-              </a:spcAft>
-              <a:defRPr sz="1100">
-                <a:solidFill>
-                  <a:srgbClr val="333333"/>
-                </a:solidFill>
-              </a:defRPr>
-            </a:pPr>
-            <a:r>
-              <a:t>│ 夹爪             │ 伺服驱动 · 0~40mm · 力控           │</a:t>
-            </a:r>
-          </a:p>
-          <a:p>
-            <a:pPr>
-              <a:spcAft>
-                <a:spcPts val="400"/>
-              </a:spcAft>
-              <a:defRPr sz="1100">
-                <a:solidFill>
-                  <a:srgbClr val="333333"/>
-                </a:solidFill>
-              </a:defRPr>
-            </a:pPr>
-            <a:r>
-              <a:t>│ 智算中枢         │ NVIDIA Jetson AGX Orin NX 16G      │</a:t>
-            </a:r>
-          </a:p>
-          <a:p>
-            <a:pPr>
-              <a:spcAft>
-                <a:spcPts val="400"/>
-              </a:spcAft>
-              <a:defRPr sz="1100">
-                <a:solidFill>
-                  <a:srgbClr val="333333"/>
-                </a:solidFill>
-              </a:defRPr>
-            </a:pPr>
-            <a:r>
-              <a:t>│ 控制周期         │ 1ms (EtherCAT)                    │</a:t>
-            </a:r>
-          </a:p>
-          <a:p>
-            <a:pPr>
-              <a:spcAft>
-                <a:spcPts val="400"/>
-              </a:spcAft>
-              <a:defRPr sz="1100">
-                <a:solidFill>
-                  <a:srgbClr val="333333"/>
-                </a:solidFill>
-              </a:defRPr>
-            </a:pPr>
-            <a:r>
-              <a:t>│ ROS2             │ Humble · Domain 23 · 21节点 51Topic│</a:t>
-            </a:r>
-          </a:p>
-          <a:p>
-            <a:pPr>
-              <a:spcAft>
-                <a:spcPts val="400"/>
-              </a:spcAft>
-              <a:defRPr sz="1100">
-                <a:solidFill>
-                  <a:srgbClr val="333333"/>
-                </a:solidFill>
-              </a:defRPr>
-            </a:pPr>
-            <a:r>
-              <a:t>│ 操作界面         │ XSpace Studio (Windows PC/平板)    │</a:t>
-            </a:r>
-          </a:p>
-          <a:p>
-            <a:pPr>
-              <a:spcAft>
-                <a:spcPts val="400"/>
-              </a:spcAft>
-              <a:defRPr sz="1100">
-                <a:solidFill>
-                  <a:srgbClr val="333333"/>
-                </a:solidFill>
-              </a:defRPr>
-            </a:pPr>
-            <a:r>
-              <a:t>│ 安全             │ 双路急停 · 力控过载 · 光栅 · 塔灯   │</a:t>
-            </a:r>
-          </a:p>
-          <a:p>
-            <a:pPr>
-              <a:spcAft>
-                <a:spcPts val="400"/>
-              </a:spcAft>
-              <a:defRPr sz="1100">
-                <a:solidFill>
-                  <a:srgbClr val="333333"/>
-                </a:solidFill>
-              </a:defRPr>
-            </a:pPr>
-            <a:r>
-              <a:t>│ 电源             │ 220VAC 即插即用                   │</a:t>
-            </a:r>
-          </a:p>
-          <a:p>
-            <a:pPr>
-              <a:spcAft>
-                <a:spcPts val="400"/>
-              </a:spcAft>
-              <a:defRPr sz="1100">
-                <a:solidFill>
-                  <a:srgbClr val="333333"/>
-                </a:solidFill>
-              </a:defRPr>
-            </a:pPr>
-            <a:r>
-              <a:t>│ 关键工序良率     │ ≥99.2% (L2基线)                   │</a:t>
-            </a:r>
-          </a:p>
-          <a:p>
-            <a:pPr>
-              <a:spcAft>
-                <a:spcPts val="400"/>
-              </a:spcAft>
-              <a:defRPr sz="1100">
-                <a:solidFill>
-                  <a:srgbClr val="333333"/>
-                </a:solidFill>
-              </a:defRPr>
-            </a:pPr>
-            <a:r>
-              <a:t>│ 保修             │ 整机2年 · 模块化30分钟更换          │</a:t>
-            </a:r>
-          </a:p>
-          <a:p>
-            <a:pPr>
-              <a:spcAft>
-                <a:spcPts val="400"/>
-              </a:spcAft>
-              <a:defRPr sz="1100">
-                <a:solidFill>
-                  <a:srgbClr val="333333"/>
-                </a:solidFill>
-              </a:defRPr>
-            </a:pPr>
-            <a:r>
-              <a:t>└─────────────────┴────────────────────────────────────┘</a:t>
-            </a:r>
-          </a:p>
-        </p:txBody>
-      </p:sp>
-    </p:spTree>
-  </p:cSld>
-  <p:clrMapOvr>
-    <a:masterClrMapping/>
-  </p:clrMapOvr>
-</p:sld>
-</file>
-
-<file path=ppt/slides/slide14.xml><?xml version="1.0" encoding="utf-8"?>
-<p:sld xmlns:a="http://schemas.openxmlformats.org/drawingml/2006/main" xmlns:p="http://schemas.openxmlformats.org/presentationml/2006/main" xmlns:r="http://schemas.openxmlformats.org/officeDocument/2006/relationships">
-  <p:cSld>
-    <p:spTree>
-      <p:nvGrpSpPr>
-        <p:cNvPr id="1" name=""/>
-        <p:cNvGrpSpPr/>
-        <p:nvPr/>
-      </p:nvGrpSpPr>
-      <p:grpSpPr/>
-      <p:sp>
-        <p:nvSpPr>
-          <p:cNvPr id="2" name="TextBox 1"/>
-          <p:cNvSpPr txBox="1"/>
-          <p:nvPr/>
-        </p:nvSpPr>
-        <p:spPr>
-          <a:xfrm>
-            <a:off x="914400" y="1645920"/>
-            <a:ext cx="10332720" cy="1371600"/>
-          </a:xfrm>
-          <a:prstGeom prst="rect">
-            <a:avLst/>
-          </a:prstGeom>
-          <a:noFill/>
-        </p:spPr>
-        <p:txBody>
-          <a:bodyPr wrap="none">
-            <a:spAutoFit/>
-          </a:bodyPr>
-          <a:lstStyle/>
-          <a:p>
-            <a:pPr>
-              <a:defRPr sz="3600" b="1">
-                <a:solidFill>
-                  <a:srgbClr val="1F497D"/>
-                </a:solidFill>
-              </a:defRPr>
-            </a:pPr>
-            <a:r>
-              <a:t>Z700 F · L2 精细操作机器人</a:t>
-            </a:r>
-          </a:p>
-        </p:txBody>
-      </p:sp>
-      <p:sp>
-        <p:nvSpPr>
-          <p:cNvPr id="3" name="TextBox 2"/>
-          <p:cNvSpPr txBox="1"/>
-          <p:nvPr/>
-        </p:nvSpPr>
-        <p:spPr>
-          <a:xfrm>
-            <a:off x="914400" y="3291840"/>
-            <a:ext cx="10332720" cy="914400"/>
-          </a:xfrm>
-          <a:prstGeom prst="rect">
-            <a:avLst/>
-          </a:prstGeom>
-          <a:noFill/>
-        </p:spPr>
-        <p:txBody>
-          <a:bodyPr wrap="none">
-            <a:spAutoFit/>
-          </a:bodyPr>
-          <a:lstStyle/>
-          <a:p>
-            <a:pPr>
+                <a:spcPts val="300"/>
+              </a:spcAft>
               <a:defRPr sz="2400">
                 <a:solidFill>
-                  <a:srgbClr val="4F81BD"/>
-                </a:solidFill>
-              </a:defRPr>
-            </a:pPr>
-            <a:r>
-              <a:t>固定式精密操作具身机器人 · 今日即可投产</a:t>
-            </a:r>
-          </a:p>
-        </p:txBody>
-      </p:sp>
-      <p:sp>
-        <p:nvSpPr>
-          <p:cNvPr id="4" name="TextBox 3"/>
-          <p:cNvSpPr txBox="1"/>
-          <p:nvPr/>
-        </p:nvSpPr>
-        <p:spPr>
-          <a:xfrm>
-            <a:off x="914400" y="4754880"/>
-            <a:ext cx="10332720" cy="457200"/>
-          </a:xfrm>
-          <a:prstGeom prst="rect">
-            <a:avLst/>
-          </a:prstGeom>
-          <a:noFill/>
-        </p:spPr>
-        <p:txBody>
-          <a:bodyPr wrap="none">
-            <a:spAutoFit/>
-          </a:bodyPr>
-          <a:lstStyle/>
-          <a:p>
-            <a:pPr>
-              <a:defRPr sz="1400">
-                <a:solidFill>
-                  <a:srgbClr val="888888"/>
-                </a:solidFill>
-              </a:defRPr>
-            </a:pPr>
-            <a:r>
-              <a:t>智蜂创元(ZFCY) · Z-MAX 智能化模型引擎 · Q/ZFCY 001.1-2026</a:t>
+                  <a:srgbClr val="333333"/>
+                </a:solidFill>
+              </a:defRPr>
+            </a:pPr>
+            <a:r>
+              <a:t>固定式精密操作具身机器人</a:t>
+            </a:r>
+          </a:p>
+          <a:p>
+            <a:pPr>
+              <a:spcAft>
+                <a:spcPts val="300"/>
+              </a:spcAft>
+              <a:defRPr sz="2400">
+                <a:solidFill>
+                  <a:srgbClr val="333333"/>
+                </a:solidFill>
+              </a:defRPr>
+            </a:pPr>
+            <a:r>
+              <a:t>Z-MAX智能化模型引擎驱动</a:t>
+            </a:r>
+          </a:p>
+          <a:p>
+            <a:pPr>
+              <a:spcAft>
+                <a:spcPts val="300"/>
+              </a:spcAft>
+              <a:defRPr sz="2400">
+                <a:solidFill>
+                  <a:srgbClr val="333333"/>
+                </a:solidFill>
+              </a:defRPr>
+            </a:pPr>
+            <a:r>
+              <a:t>智蜂创元(ZFCY)·Q/ZFCY 001.1-2026</a:t>
             </a:r>
           </a:p>
         </p:txBody>
@@ -4537,7 +4005,7 @@
         <p:spPr>
           <a:xfrm>
             <a:off x="0" y="0"/>
-            <a:ext cx="12191695" cy="640080"/>
+            <a:ext cx="12191695" cy="594360"/>
           </a:xfrm>
           <a:prstGeom prst="rect">
             <a:avLst/>
@@ -4580,7 +4048,7 @@
         <p:spPr>
           <a:xfrm>
             <a:off x="457200" y="45720"/>
-            <a:ext cx="10972800" cy="548640"/>
+            <a:ext cx="10972800" cy="502920"/>
           </a:xfrm>
           <a:prstGeom prst="rect">
             <a:avLst/>
@@ -4594,14 +4062,14 @@
           <a:lstStyle/>
           <a:p>
             <a:pPr>
-              <a:defRPr sz="2600" b="1">
+              <a:defRPr sz="2400" b="1">
                 <a:solidFill>
                   <a:srgbClr val="FFFFFF"/>
                 </a:solidFill>
               </a:defRPr>
             </a:pPr>
             <a:r>
-              <a:t>产品定位 · Z700 F + Z-MAX</a:t>
+              <a:t>产品架构</a:t>
             </a:r>
           </a:p>
         </p:txBody>
@@ -4614,8 +4082,8 @@
         </p:nvSpPr>
         <p:spPr>
           <a:xfrm>
-            <a:off x="457200" y="1005840"/>
-            <a:ext cx="10972800" cy="5486400"/>
+            <a:off x="457200" y="914400"/>
+            <a:ext cx="10972800" cy="5669280"/>
           </a:xfrm>
           <a:prstGeom prst="rect">
             <a:avLst/>
@@ -4630,142 +4098,88 @@
           <a:p>
             <a:pPr>
               <a:spcAft>
-                <a:spcPts val="400"/>
-              </a:spcAft>
-              <a:defRPr sz="1500">
-                <a:solidFill>
-                  <a:srgbClr val="333333"/>
-                </a:solidFill>
-              </a:defRPr>
-            </a:pPr>
-            <a:r>
-              <a:t>Z700 F 是一台固定式精密操作机器人，专为光模块产线精细插拔工序设计。</a:t>
-            </a:r>
-          </a:p>
-          <a:p>
-            <a:pPr>
-              <a:spcAft>
-                <a:spcPts val="400"/>
-              </a:spcAft>
-              <a:defRPr sz="1500">
-                <a:solidFill>
-                  <a:srgbClr val="333333"/>
-                </a:solidFill>
-              </a:defRPr>
-            </a:pPr>
-          </a:p>
-          <a:p>
-            <a:pPr>
-              <a:spcAft>
-                <a:spcPts val="400"/>
-              </a:spcAft>
-              <a:defRPr sz="1500">
-                <a:solidFill>
-                  <a:srgbClr val="333333"/>
-                </a:solidFill>
-              </a:defRPr>
-            </a:pPr>
-            <a:r>
-              <a:t>它搭载 Z-MAX 智能化模型引擎，在 L2 基线版采用人工编制流程 + 标准原子功能库</a:t>
-            </a:r>
-          </a:p>
-          <a:p>
-            <a:pPr>
-              <a:spcAft>
-                <a:spcPts val="400"/>
-              </a:spcAft>
-              <a:defRPr sz="1500">
-                <a:solidFill>
-                  <a:srgbClr val="333333"/>
-                </a:solidFill>
-              </a:defRPr>
-            </a:pPr>
-            <a:r>
-              <a:t>的工作方式，实现 ±0.05mm 精度的力控插拔操作。</a:t>
-            </a:r>
-          </a:p>
-          <a:p>
-            <a:pPr>
-              <a:spcAft>
-                <a:spcPts val="400"/>
-              </a:spcAft>
-              <a:defRPr sz="1500">
-                <a:solidFill>
-                  <a:srgbClr val="333333"/>
-                </a:solidFill>
-              </a:defRPr>
-            </a:pPr>
-          </a:p>
-          <a:p>
-            <a:pPr>
-              <a:spcAft>
-                <a:spcPts val="400"/>
-              </a:spcAft>
-              <a:defRPr sz="1500">
-                <a:solidFill>
-                  <a:srgbClr val="333333"/>
-                </a:solidFill>
-              </a:defRPr>
-            </a:pPr>
-            <a:r>
-              <a:t>◈  Z-MAX = 智能化模型（软件引擎）    ◈  Z700 F = 精细操作机器人（硬件载体）</a:t>
-            </a:r>
-          </a:p>
-          <a:p>
-            <a:pPr>
-              <a:spcAft>
-                <a:spcPts val="400"/>
-              </a:spcAft>
-              <a:defRPr sz="1500">
-                <a:solidFill>
-                  <a:srgbClr val="333333"/>
-                </a:solidFill>
-              </a:defRPr>
-            </a:pPr>
-            <a:r>
-              <a:t>◈  Z700 = L4 级全自主精细操作机器人   ◈  Z700 F = L2 基线固定版</a:t>
-            </a:r>
-          </a:p>
-          <a:p>
-            <a:pPr>
-              <a:spcAft>
-                <a:spcPts val="400"/>
-              </a:spcAft>
-              <a:defRPr sz="1500">
-                <a:solidFill>
-                  <a:srgbClr val="333333"/>
-                </a:solidFill>
-              </a:defRPr>
-            </a:pPr>
-          </a:p>
-          <a:p>
-            <a:pPr>
-              <a:spcAft>
-                <a:spcPts val="400"/>
-              </a:spcAft>
-              <a:defRPr sz="1500">
-                <a:solidFill>
-                  <a:srgbClr val="333333"/>
-                </a:solidFill>
-              </a:defRPr>
-            </a:pPr>
-            <a:r>
-              <a:t>Z700 F 是 Z700 系列的首个量产版本。</a:t>
-            </a:r>
-          </a:p>
-          <a:p>
-            <a:pPr>
-              <a:spcAft>
-                <a:spcPts val="400"/>
-              </a:spcAft>
-              <a:defRPr sz="1500">
-                <a:solidFill>
-                  <a:srgbClr val="333333"/>
-                </a:solidFill>
-              </a:defRPr>
-            </a:pPr>
-            <a:r>
-              <a:t>未来通过 OTA 软件升级可演进至 L3 增强版和 L4 旗舰版，硬件无需更换。</a:t>
+                <a:spcPts val="300"/>
+              </a:spcAft>
+              <a:defRPr sz="1400">
+                <a:solidFill>
+                  <a:srgbClr val="333333"/>
+                </a:solidFill>
+              </a:defRPr>
+            </a:pPr>
+            <a:r>
+              <a:t>Z-MAX 智能化模型引擎 (软件层)</a:t>
+            </a:r>
+          </a:p>
+          <a:p>
+            <a:pPr>
+              <a:spcAft>
+                <a:spcPts val="300"/>
+              </a:spcAft>
+              <a:defRPr sz="1400">
+                <a:solidFill>
+                  <a:srgbClr val="333333"/>
+                </a:solidFill>
+              </a:defRPr>
+            </a:pPr>
+            <a:r>
+              <a:t>L2:人工编排→L3:多模态端到端→L4:精细感知</a:t>
+            </a:r>
+          </a:p>
+          <a:p>
+            <a:pPr>
+              <a:spcAft>
+                <a:spcPts val="300"/>
+              </a:spcAft>
+              <a:defRPr sz="1400">
+                <a:solidFill>
+                  <a:srgbClr val="333333"/>
+                </a:solidFill>
+              </a:defRPr>
+            </a:pPr>
+          </a:p>
+          <a:p>
+            <a:pPr>
+              <a:spcAft>
+                <a:spcPts val="300"/>
+              </a:spcAft>
+              <a:defRPr sz="1400">
+                <a:solidFill>
+                  <a:srgbClr val="333333"/>
+                </a:solidFill>
+              </a:defRPr>
+            </a:pPr>
+            <a:r>
+              <a:t>Z700 F 硬件平台</a:t>
+            </a:r>
+          </a:p>
+          <a:p>
+            <a:pPr>
+              <a:spcAft>
+                <a:spcPts val="300"/>
+              </a:spcAft>
+              <a:defRPr sz="1400">
+                <a:solidFill>
+                  <a:srgbClr val="333333"/>
+                </a:solidFill>
+              </a:defRPr>
+            </a:pPr>
+            <a:r>
+              <a:t>6轴机械臂·AGX Orin NX·双3D相机·DH夹爪</a:t>
+            </a:r>
+          </a:p>
+          <a:p>
+            <a:pPr>
+              <a:spcAft>
+                <a:spcPts val="300"/>
+              </a:spcAft>
+              <a:defRPr sz="1400">
+                <a:solidFill>
+                  <a:srgbClr val="333333"/>
+                </a:solidFill>
+              </a:defRPr>
+            </a:pPr>
+            <a:r>
+              <a:t>六维力传感器·触觉传感器·塔灯·急停·光栅</a:t>
             </a:r>
           </a:p>
         </p:txBody>
@@ -4797,7 +4211,7 @@
         <p:spPr>
           <a:xfrm>
             <a:off x="0" y="0"/>
-            <a:ext cx="12191695" cy="640080"/>
+            <a:ext cx="12191695" cy="594360"/>
           </a:xfrm>
           <a:prstGeom prst="rect">
             <a:avLst/>
@@ -4840,7 +4254,7 @@
         <p:spPr>
           <a:xfrm>
             <a:off x="457200" y="45720"/>
-            <a:ext cx="10972800" cy="548640"/>
+            <a:ext cx="10972800" cy="502920"/>
           </a:xfrm>
           <a:prstGeom prst="rect">
             <a:avLst/>
@@ -4854,14 +4268,14 @@
           <a:lstStyle/>
           <a:p>
             <a:pPr>
-              <a:defRPr sz="2600" b="1">
+              <a:defRPr sz="2400" b="1">
                 <a:solidFill>
                   <a:srgbClr val="FFFFFF"/>
                 </a:solidFill>
               </a:defRPr>
             </a:pPr>
             <a:r>
-              <a:t>产品架构 · 软件+硬件分层</a:t>
+              <a:t>L2基线版·6步操作流程</a:t>
             </a:r>
           </a:p>
         </p:txBody>
@@ -4874,8 +4288,8 @@
         </p:nvSpPr>
         <p:spPr>
           <a:xfrm>
-            <a:off x="457200" y="1005840"/>
-            <a:ext cx="10972800" cy="5486400"/>
+            <a:off x="457200" y="914400"/>
+            <a:ext cx="10972800" cy="5669280"/>
           </a:xfrm>
           <a:prstGeom prst="rect">
             <a:avLst/>
@@ -4890,223 +4304,58 @@
           <a:p>
             <a:pPr>
               <a:spcAft>
-                <a:spcPts val="400"/>
-              </a:spcAft>
-              <a:defRPr sz="1400">
-                <a:solidFill>
-                  <a:srgbClr val="333333"/>
-                </a:solidFill>
-              </a:defRPr>
-            </a:pPr>
-            <a:r>
-              <a:t>┌──────────────────────────────────────────────────────┐</a:t>
-            </a:r>
-          </a:p>
-          <a:p>
-            <a:pPr>
-              <a:spcAft>
-                <a:spcPts val="400"/>
-              </a:spcAft>
-              <a:defRPr sz="1400">
-                <a:solidFill>
-                  <a:srgbClr val="333333"/>
-                </a:solidFill>
-              </a:defRPr>
-            </a:pPr>
-            <a:r>
-              <a:t>│              Z-MAX 智能化模型引擎                      │</a:t>
-            </a:r>
-          </a:p>
-          <a:p>
-            <a:pPr>
-              <a:spcAft>
-                <a:spcPts val="400"/>
-              </a:spcAft>
-              <a:defRPr sz="1400">
-                <a:solidFill>
-                  <a:srgbClr val="333333"/>
-                </a:solidFill>
-              </a:defRPr>
-            </a:pPr>
-            <a:r>
-              <a:t>│  L2: 人工流程编排  |  L3: 多模态端到端  |  L4: 精细感知 │</a:t>
-            </a:r>
-          </a:p>
-          <a:p>
-            <a:pPr>
-              <a:spcAft>
-                <a:spcPts val="400"/>
-              </a:spcAft>
-              <a:defRPr sz="1400">
-                <a:solidFill>
-                  <a:srgbClr val="333333"/>
-                </a:solidFill>
-              </a:defRPr>
-            </a:pPr>
-            <a:r>
-              <a:t>├──────────────────────────────────────────────────────┤</a:t>
-            </a:r>
-          </a:p>
-          <a:p>
-            <a:pPr>
-              <a:spcAft>
-                <a:spcPts val="400"/>
-              </a:spcAft>
-              <a:defRPr sz="1400">
-                <a:solidFill>
-                  <a:srgbClr val="333333"/>
-                </a:solidFill>
-              </a:defRPr>
-            </a:pPr>
-            <a:r>
-              <a:t>│              Z700 F 硬件平台                          │</a:t>
-            </a:r>
-          </a:p>
-          <a:p>
-            <a:pPr>
-              <a:spcAft>
-                <a:spcPts val="400"/>
-              </a:spcAft>
-              <a:defRPr sz="1400">
-                <a:solidFill>
-                  <a:srgbClr val="333333"/>
-                </a:solidFill>
-              </a:defRPr>
-            </a:pPr>
-            <a:r>
-              <a:t>│                                                      │</a:t>
-            </a:r>
-          </a:p>
-          <a:p>
-            <a:pPr>
-              <a:spcAft>
-                <a:spcPts val="400"/>
-              </a:spcAft>
-              <a:defRPr sz="1400">
-                <a:solidFill>
-                  <a:srgbClr val="333333"/>
-                </a:solidFill>
-              </a:defRPr>
-            </a:pPr>
-            <a:r>
-              <a:t>│  🤖 6轴协作机械臂(5kg/911mm)    ⚡ 六维力传感器(&gt;10kHz) │</a:t>
-            </a:r>
-          </a:p>
-          <a:p>
-            <a:pPr>
-              <a:spcAft>
-                <a:spcPts val="400"/>
-              </a:spcAft>
-              <a:defRPr sz="1400">
-                <a:solidFill>
-                  <a:srgbClr val="333333"/>
-                </a:solidFill>
-              </a:defRPr>
-            </a:pPr>
-            <a:r>
-              <a:t>│  📷 双3D深度相机(结构光+RealSense) 🖐️ 伺服电动夹爪       │</a:t>
-            </a:r>
-          </a:p>
-          <a:p>
-            <a:pPr>
-              <a:spcAft>
-                <a:spcPts val="400"/>
-              </a:spcAft>
-              <a:defRPr sz="1400">
-                <a:solidFill>
-                  <a:srgbClr val="333333"/>
-                </a:solidFill>
-              </a:defRPr>
-            </a:pPr>
-            <a:r>
-              <a:t>│  🧠 AGX Orin NX 智算中枢         🚦 三色塔灯(绿黄红)    │</a:t>
-            </a:r>
-          </a:p>
-          <a:p>
-            <a:pPr>
-              <a:spcAft>
-                <a:spcPts val="400"/>
-              </a:spcAft>
-              <a:defRPr sz="1400">
-                <a:solidFill>
-                  <a:srgbClr val="333333"/>
-                </a:solidFill>
-              </a:defRPr>
-            </a:pPr>
-            <a:r>
-              <a:t>│  🛑 双路急停+安全光栅×2           📱 Honeywell扫码枪    │</a:t>
-            </a:r>
-          </a:p>
-          <a:p>
-            <a:pPr>
-              <a:spcAft>
-                <a:spcPts val="400"/>
-              </a:spcAft>
-              <a:defRPr sz="1400">
-                <a:solidFill>
-                  <a:srgbClr val="333333"/>
-                </a:solidFill>
-              </a:defRPr>
-            </a:pPr>
-            <a:r>
-              <a:t>│  🖐️ TS-T-15 触觉传感器(3D力)      🖥️ XSpace Studio操控台 │</a:t>
-            </a:r>
-          </a:p>
-          <a:p>
-            <a:pPr>
-              <a:spcAft>
-                <a:spcPts val="400"/>
-              </a:spcAft>
-              <a:defRPr sz="1400">
-                <a:solidFill>
-                  <a:srgbClr val="333333"/>
-                </a:solidFill>
-              </a:defRPr>
-            </a:pPr>
-            <a:r>
-              <a:t>└──────────────────────────────────────────────────────┘</a:t>
-            </a:r>
-          </a:p>
-          <a:p>
-            <a:pPr>
-              <a:spcAft>
-                <a:spcPts val="400"/>
-              </a:spcAft>
-              <a:defRPr sz="1400">
-                <a:solidFill>
-                  <a:srgbClr val="333333"/>
-                </a:solidFill>
-              </a:defRPr>
-            </a:pPr>
-          </a:p>
-          <a:p>
-            <a:pPr>
-              <a:spcAft>
-                <a:spcPts val="400"/>
-              </a:spcAft>
-              <a:defRPr sz="1400">
-                <a:solidFill>
-                  <a:srgbClr val="333333"/>
-                </a:solidFill>
-              </a:defRPr>
-            </a:pPr>
-            <a:r>
-              <a:t>Z-MAX 负责: 工序编排 · 动作决策 · 力控闭环 · 视觉定位</a:t>
-            </a:r>
-          </a:p>
-          <a:p>
-            <a:pPr>
-              <a:spcAft>
-                <a:spcPts val="400"/>
-              </a:spcAft>
-              <a:defRPr sz="1400">
-                <a:solidFill>
-                  <a:srgbClr val="333333"/>
-                </a:solidFill>
-              </a:defRPr>
-            </a:pPr>
-            <a:r>
-              <a:t>Z700 F 负责: 精确运动执行 · 传感器采集 · 安全保护</a:t>
+                <a:spcPts val="300"/>
+              </a:spcAft>
+              <a:defRPr sz="1600">
+                <a:solidFill>
+                  <a:srgbClr val="333333"/>
+                </a:solidFill>
+              </a:defRPr>
+            </a:pPr>
+            <a:r>
+              <a:t>系统0·分段式·标准原子功能库·动作(标准接口)·真实环境</a:t>
+            </a:r>
+          </a:p>
+          <a:p>
+            <a:pPr>
+              <a:spcAft>
+                <a:spcPts val="300"/>
+              </a:spcAft>
+              <a:defRPr sz="1600">
+                <a:solidFill>
+                  <a:srgbClr val="333333"/>
+                </a:solidFill>
+              </a:defRPr>
+            </a:pPr>
+          </a:p>
+          <a:p>
+            <a:pPr>
+              <a:spcAft>
+                <a:spcPts val="300"/>
+              </a:spcAft>
+              <a:defRPr sz="1600">
+                <a:solidFill>
+                  <a:srgbClr val="333333"/>
+                </a:solidFill>
+              </a:defRPr>
+            </a:pPr>
+            <a:r>
+              <a:t>①人工流程编排 ②标准原子功能 ③动作执行</a:t>
+            </a:r>
+          </a:p>
+          <a:p>
+            <a:pPr>
+              <a:spcAft>
+                <a:spcPts val="300"/>
+              </a:spcAft>
+              <a:defRPr sz="1600">
+                <a:solidFill>
+                  <a:srgbClr val="333333"/>
+                </a:solidFill>
+              </a:defRPr>
+            </a:pPr>
+            <a:r>
+              <a:t>④力控反馈 ⑤AOI验证 ⑥成品下料</a:t>
             </a:r>
           </a:p>
         </p:txBody>
@@ -5138,7 +4387,7 @@
         <p:spPr>
           <a:xfrm>
             <a:off x="0" y="0"/>
-            <a:ext cx="12191695" cy="640080"/>
+            <a:ext cx="12191695" cy="594360"/>
           </a:xfrm>
           <a:prstGeom prst="rect">
             <a:avLst/>
@@ -5181,7 +4430,7 @@
         <p:spPr>
           <a:xfrm>
             <a:off x="457200" y="45720"/>
-            <a:ext cx="10972800" cy="548640"/>
+            <a:ext cx="10972800" cy="502920"/>
           </a:xfrm>
           <a:prstGeom prst="rect">
             <a:avLst/>
@@ -5195,14 +4444,14 @@
           <a:lstStyle/>
           <a:p>
             <a:pPr>
-              <a:defRPr sz="2600" b="1">
+              <a:defRPr sz="2400" b="1">
                 <a:solidFill>
                   <a:srgbClr val="FFFFFF"/>
                 </a:solidFill>
               </a:defRPr>
             </a:pPr>
             <a:r>
-              <a:t>L2 基线版 · 人工编制流程（6步）</a:t>
+              <a:t>硬件配置(Phase 0交付物)</a:t>
             </a:r>
           </a:p>
         </p:txBody>
@@ -5215,8 +4464,8 @@
         </p:nvSpPr>
         <p:spPr>
           <a:xfrm>
-            <a:off x="457200" y="1005840"/>
-            <a:ext cx="10972800" cy="5486400"/>
+            <a:off x="457200" y="914400"/>
+            <a:ext cx="10972800" cy="5669280"/>
           </a:xfrm>
           <a:prstGeom prst="rect">
             <a:avLst/>
@@ -5231,145 +4480,106 @@
           <a:p>
             <a:pPr>
               <a:spcAft>
-                <a:spcPts val="400"/>
-              </a:spcAft>
-              <a:defRPr sz="1500">
-                <a:solidFill>
-                  <a:srgbClr val="333333"/>
-                </a:solidFill>
-              </a:defRPr>
-            </a:pPr>
-            <a:r>
-              <a:t>系统 0 · 分段式 · 标准原子功能库 · 动作(标准接口) · 真实环境</a:t>
-            </a:r>
-          </a:p>
-          <a:p>
-            <a:pPr>
-              <a:spcAft>
-                <a:spcPts val="400"/>
-              </a:spcAft>
-              <a:defRPr sz="1500">
-                <a:solidFill>
-                  <a:srgbClr val="333333"/>
-                </a:solidFill>
-              </a:defRPr>
-            </a:pPr>
-          </a:p>
-          <a:p>
-            <a:pPr>
-              <a:spcAft>
-                <a:spcPts val="400"/>
-              </a:spcAft>
-              <a:defRPr sz="1500">
-                <a:solidFill>
-                  <a:srgbClr val="333333"/>
-                </a:solidFill>
-              </a:defRPr>
-            </a:pPr>
-            <a:r>
-              <a:t>操作员编排 ─→ 标准原子功能 ─→ 动作执行 ─→ 力控反馈 ─→ 分段验证 ─→ 成品下料</a:t>
-            </a:r>
-          </a:p>
-          <a:p>
-            <a:pPr>
-              <a:spcAft>
-                <a:spcPts val="400"/>
-              </a:spcAft>
-              <a:defRPr sz="1500">
-                <a:solidFill>
-                  <a:srgbClr val="333333"/>
-                </a:solidFill>
-              </a:defRPr>
-            </a:pPr>
-          </a:p>
-          <a:p>
-            <a:pPr>
-              <a:spcAft>
-                <a:spcPts val="400"/>
-              </a:spcAft>
-              <a:defRPr sz="1500">
-                <a:solidFill>
-                  <a:srgbClr val="333333"/>
-                </a:solidFill>
-              </a:defRPr>
-            </a:pPr>
-            <a:r>
-              <a:t>① 人工流程编排      操作员在 XSpace Studio 中设定工序参数，选择标准原子功能</a:t>
-            </a:r>
-          </a:p>
-          <a:p>
-            <a:pPr>
-              <a:spcAft>
-                <a:spcPts val="400"/>
-              </a:spcAft>
-              <a:defRPr sz="1500">
-                <a:solidFill>
-                  <a:srgbClr val="333333"/>
-                </a:solidFill>
-              </a:defRPr>
-            </a:pPr>
-            <a:r>
-              <a:t>② 标准原子功能      取料、扫码、定位、对准、插入、拔出、检测、分类</a:t>
-            </a:r>
-          </a:p>
-          <a:p>
-            <a:pPr>
-              <a:spcAft>
-                <a:spcPts val="400"/>
-              </a:spcAft>
-              <a:defRPr sz="1500">
-                <a:solidFill>
-                  <a:srgbClr val="333333"/>
-                </a:solidFill>
-              </a:defRPr>
-            </a:pPr>
-            <a:r>
-              <a:t>③ 动作执行          基于 ROS2 标准接口，点到点精确运动 ±0.05mm</a:t>
-            </a:r>
-          </a:p>
-          <a:p>
-            <a:pPr>
-              <a:spcAft>
-                <a:spcPts val="400"/>
-              </a:spcAft>
-              <a:defRPr sz="1500">
-                <a:solidFill>
-                  <a:srgbClr val="333333"/>
-                </a:solidFill>
-              </a:defRPr>
-            </a:pPr>
-            <a:r>
-              <a:t>④ 力控反馈          六维力传感器 &gt;10kHz 采样，夹持力自适应闭环</a:t>
-            </a:r>
-          </a:p>
-          <a:p>
-            <a:pPr>
-              <a:spcAft>
-                <a:spcPts val="400"/>
-              </a:spcAft>
-              <a:defRPr sz="1500">
-                <a:solidFill>
-                  <a:srgbClr val="333333"/>
-                </a:solidFill>
-              </a:defRPr>
-            </a:pPr>
-            <a:r>
-              <a:t>⑤ 分段式验证        每步完成确认后才进入下一步 · 异常自动停机</a:t>
-            </a:r>
-          </a:p>
-          <a:p>
-            <a:pPr>
-              <a:spcAft>
-                <a:spcPts val="400"/>
-              </a:spcAft>
-              <a:defRPr sz="1500">
-                <a:solidFill>
-                  <a:srgbClr val="333333"/>
-                </a:solidFill>
-              </a:defRPr>
-            </a:pPr>
-            <a:r>
-              <a:t>⑥ 成品下料          取出完成品并记录检测数据</a:t>
+                <a:spcPts val="300"/>
+              </a:spcAft>
+              <a:defRPr sz="1400">
+                <a:solidFill>
+                  <a:srgbClr val="333333"/>
+                </a:solidFill>
+              </a:defRPr>
+            </a:pPr>
+            <a:r>
+              <a:t>6轴机械臂SR5-C·5kg·911mm</a:t>
+            </a:r>
+          </a:p>
+          <a:p>
+            <a:pPr>
+              <a:spcAft>
+                <a:spcPts val="300"/>
+              </a:spcAft>
+              <a:defRPr sz="1400">
+                <a:solidFill>
+                  <a:srgbClr val="333333"/>
+                </a:solidFill>
+              </a:defRPr>
+            </a:pPr>
+            <a:r>
+              <a:t>Jetson AGX Orin NX 16G</a:t>
+            </a:r>
+          </a:p>
+          <a:p>
+            <a:pPr>
+              <a:spcAft>
+                <a:spcPts val="300"/>
+              </a:spcAft>
+              <a:defRPr sz="1400">
+                <a:solidFill>
+                  <a:srgbClr val="333333"/>
+                </a:solidFill>
+              </a:defRPr>
+            </a:pPr>
+            <a:r>
+              <a:t>Mech-Eye NANO ULTRA + RealSense D405</a:t>
+            </a:r>
+          </a:p>
+          <a:p>
+            <a:pPr>
+              <a:spcAft>
+                <a:spcPts val="300"/>
+              </a:spcAft>
+              <a:defRPr sz="1400">
+                <a:solidFill>
+                  <a:srgbClr val="333333"/>
+                </a:solidFill>
+              </a:defRPr>
+            </a:pPr>
+            <a:r>
+              <a:t>DH PEGA-50-26夹爪·TS-T-15触觉</a:t>
+            </a:r>
+          </a:p>
+          <a:p>
+            <a:pPr>
+              <a:spcAft>
+                <a:spcPts val="300"/>
+              </a:spcAft>
+              <a:defRPr sz="1400">
+                <a:solidFill>
+                  <a:srgbClr val="333333"/>
+                </a:solidFill>
+              </a:defRPr>
+            </a:pPr>
+            <a:r>
+              <a:t>六维力传感器·Honeywell扫码枪</a:t>
+            </a:r>
+          </a:p>
+          <a:p>
+            <a:pPr>
+              <a:spcAft>
+                <a:spcPts val="300"/>
+              </a:spcAft>
+              <a:defRPr sz="1400">
+                <a:solidFill>
+                  <a:srgbClr val="333333"/>
+                </a:solidFill>
+              </a:defRPr>
+            </a:pPr>
+            <a:r>
+              <a:t>安全光栅KE22-1040×2·三色塔灯·双路急停</a:t>
+            </a:r>
+          </a:p>
+          <a:p>
+            <a:pPr>
+              <a:spcAft>
+                <a:spcPts val="300"/>
+              </a:spcAft>
+              <a:defRPr sz="1400">
+                <a:solidFill>
+                  <a:srgbClr val="333333"/>
+                </a:solidFill>
+              </a:defRPr>
+            </a:pPr>
+            <a:r>
+              <a:t>400G+100G工装夹具·明纬电源模块</a:t>
             </a:r>
           </a:p>
         </p:txBody>
@@ -5401,7 +4611,7 @@
         <p:spPr>
           <a:xfrm>
             <a:off x="0" y="0"/>
-            <a:ext cx="12191695" cy="640080"/>
+            <a:ext cx="12191695" cy="594360"/>
           </a:xfrm>
           <a:prstGeom prst="rect">
             <a:avLst/>
@@ -5444,7 +4654,7 @@
         <p:spPr>
           <a:xfrm>
             <a:off x="457200" y="45720"/>
-            <a:ext cx="10972800" cy="548640"/>
+            <a:ext cx="10972800" cy="502920"/>
           </a:xfrm>
           <a:prstGeom prst="rect">
             <a:avLst/>
@@ -5458,14 +4668,14 @@
           <a:lstStyle/>
           <a:p>
             <a:pPr>
-              <a:defRPr sz="2600" b="1">
+              <a:defRPr sz="2400" b="1">
                 <a:solidFill>
                   <a:srgbClr val="FFFFFF"/>
                 </a:solidFill>
               </a:defRPr>
             </a:pPr>
             <a:r>
-              <a:t>硬件配置 · 基于 Phase 0 交付物</a:t>
+              <a:t>电气系统</a:t>
             </a:r>
           </a:p>
         </p:txBody>
@@ -5478,8 +4688,8 @@
         </p:nvSpPr>
         <p:spPr>
           <a:xfrm>
-            <a:off x="457200" y="1005840"/>
-            <a:ext cx="10972800" cy="5486400"/>
+            <a:off x="457200" y="914400"/>
+            <a:ext cx="10972800" cy="5669280"/>
           </a:xfrm>
           <a:prstGeom prst="rect">
             <a:avLst/>
@@ -5494,196 +4704,76 @@
           <a:p>
             <a:pPr>
               <a:spcAft>
-                <a:spcPts val="400"/>
-              </a:spcAft>
-              <a:defRPr sz="1100">
-                <a:solidFill>
-                  <a:srgbClr val="333333"/>
-                </a:solidFill>
-              </a:defRPr>
-            </a:pPr>
-            <a:r>
-              <a:t>组件              规格                        功能</a:t>
-            </a:r>
-          </a:p>
-          <a:p>
-            <a:pPr>
-              <a:spcAft>
-                <a:spcPts val="400"/>
-              </a:spcAft>
-              <a:defRPr sz="1100">
-                <a:solidFill>
-                  <a:srgbClr val="333333"/>
-                </a:solidFill>
-              </a:defRPr>
-            </a:pPr>
-            <a:r>
-              <a:t>─────────────────────────────────────────────────────</a:t>
-            </a:r>
-          </a:p>
-          <a:p>
-            <a:pPr>
-              <a:spcAft>
-                <a:spcPts val="400"/>
-              </a:spcAft>
-              <a:defRPr sz="1100">
-                <a:solidFill>
-                  <a:srgbClr val="333333"/>
-                </a:solidFill>
-              </a:defRPr>
-            </a:pPr>
-            <a:r>
-              <a:t>机械臂            6轴协作型·负载5kg·臂展911mm   精密运动执行</a:t>
-            </a:r>
-          </a:p>
-          <a:p>
-            <a:pPr>
-              <a:spcAft>
-                <a:spcPts val="400"/>
-              </a:spcAft>
-              <a:defRPr sz="1100">
-                <a:solidFill>
-                  <a:srgbClr val="333333"/>
-                </a:solidFill>
-              </a:defRPr>
-            </a:pPr>
-            <a:r>
-              <a:t>智算中枢          Jetson AGX Orin NX 16G        实时控制·AI推理</a:t>
-            </a:r>
-          </a:p>
-          <a:p>
-            <a:pPr>
-              <a:spcAft>
-                <a:spcPts val="400"/>
-              </a:spcAft>
-              <a:defRPr sz="1100">
-                <a:solidFill>
-                  <a:srgbClr val="333333"/>
-                </a:solidFill>
-              </a:defRPr>
-            </a:pPr>
-            <a:r>
-              <a:t>主深度相机        高精度3D结构光                 模块定位·位姿估计</a:t>
-            </a:r>
-          </a:p>
-          <a:p>
-            <a:pPr>
-              <a:spcAft>
-                <a:spcPts val="400"/>
-              </a:spcAft>
-              <a:defRPr sz="1100">
-                <a:solidFill>
-                  <a:srgbClr val="333333"/>
-                </a:solidFill>
-              </a:defRPr>
-            </a:pPr>
-            <a:r>
-              <a:t>辅深度相机        Intel RealSense D405          辅助视角·3D点云</a:t>
-            </a:r>
-          </a:p>
-          <a:p>
-            <a:pPr>
-              <a:spcAft>
-                <a:spcPts val="400"/>
-              </a:spcAft>
-              <a:defRPr sz="1100">
-                <a:solidFill>
-                  <a:srgbClr val="333333"/>
-                </a:solidFill>
-              </a:defRPr>
-            </a:pPr>
-            <a:r>
-              <a:t>电动夹爪          伺服驱动·夹持力可调            抓取·力控插拔</a:t>
-            </a:r>
-          </a:p>
-          <a:p>
-            <a:pPr>
-              <a:spcAft>
-                <a:spcPts val="400"/>
-              </a:spcAft>
-              <a:defRPr sz="1100">
-                <a:solidFill>
-                  <a:srgbClr val="333333"/>
-                </a:solidFill>
-              </a:defRPr>
-            </a:pPr>
-            <a:r>
-              <a:t>触觉传感器        TS-T-15·单点三维力             接触力实时反馈</a:t>
-            </a:r>
-          </a:p>
-          <a:p>
-            <a:pPr>
-              <a:spcAft>
-                <a:spcPts val="400"/>
-              </a:spcAft>
-              <a:defRPr sz="1100">
-                <a:solidFill>
-                  <a:srgbClr val="333333"/>
-                </a:solidFill>
-              </a:defRPr>
-            </a:pPr>
-            <a:r>
-              <a:t>六维力传感器      Fx/Fy/Fz/Tx/Ty/Tz             力控闭环核心</a:t>
-            </a:r>
-          </a:p>
-          <a:p>
-            <a:pPr>
-              <a:spcAft>
-                <a:spcPts val="400"/>
-              </a:spcAft>
-              <a:defRPr sz="1100">
-                <a:solidFill>
-                  <a:srgbClr val="333333"/>
-                </a:solidFill>
-              </a:defRPr>
-            </a:pPr>
-            <a:r>
-              <a:t>扫码枪            Honeywell 3320GHD·USB         模块SN自动识别</a:t>
-            </a:r>
-          </a:p>
-          <a:p>
-            <a:pPr>
-              <a:spcAft>
-                <a:spcPts val="400"/>
-              </a:spcAft>
-              <a:defRPr sz="1100">
-                <a:solidFill>
-                  <a:srgbClr val="333333"/>
-                </a:solidFill>
-              </a:defRPr>
-            </a:pPr>
-            <a:r>
-              <a:t>安全光栅          KE22-1040×2对                 人员进入检测</a:t>
-            </a:r>
-          </a:p>
-          <a:p>
-            <a:pPr>
-              <a:spcAft>
-                <a:spcPts val="400"/>
-              </a:spcAft>
-              <a:defRPr sz="1100">
-                <a:solidFill>
-                  <a:srgbClr val="333333"/>
-                </a:solidFill>
-              </a:defRPr>
-            </a:pPr>
-            <a:r>
-              <a:t>三色塔灯          绿/黄/红 LED                  状态一目了然</a:t>
-            </a:r>
-          </a:p>
-          <a:p>
-            <a:pPr>
-              <a:spcAft>
-                <a:spcPts val="400"/>
-              </a:spcAft>
-              <a:defRPr sz="1100">
-                <a:solidFill>
-                  <a:srgbClr val="333333"/>
-                </a:solidFill>
-              </a:defRPr>
-            </a:pPr>
-            <a:r>
-              <a:t>双路急停          物理按钮+USB外接               紧急停止冗余</a:t>
+                <a:spcPts val="300"/>
+              </a:spcAft>
+              <a:defRPr sz="1500">
+                <a:solidFill>
+                  <a:srgbClr val="333333"/>
+                </a:solidFill>
+              </a:defRPr>
+            </a:pPr>
+            <a:r>
+              <a:t>220VAC→24VDC(机械臂/夹爪/塔灯)</a:t>
+            </a:r>
+          </a:p>
+          <a:p>
+            <a:pPr>
+              <a:spcAft>
+                <a:spcPts val="300"/>
+              </a:spcAft>
+              <a:defRPr sz="1500">
+                <a:solidFill>
+                  <a:srgbClr val="333333"/>
+                </a:solidFill>
+              </a:defRPr>
+            </a:pPr>
+            <a:r>
+              <a:t>→19VDC(Orin NX) →12VDC(交换机) →5VDC(USB)</a:t>
+            </a:r>
+          </a:p>
+          <a:p>
+            <a:pPr>
+              <a:spcAft>
+                <a:spcPts val="300"/>
+              </a:spcAft>
+              <a:defRPr sz="1500">
+                <a:solidFill>
+                  <a:srgbClr val="333333"/>
+                </a:solidFill>
+              </a:defRPr>
+            </a:pPr>
+            <a:r>
+              <a:t>Ethernet↔Orin↔USB(相机/扫码枪)</a:t>
+            </a:r>
+          </a:p>
+          <a:p>
+            <a:pPr>
+              <a:spcAft>
+                <a:spcPts val="300"/>
+              </a:spcAft>
+              <a:defRPr sz="1500">
+                <a:solidFill>
+                  <a:srgbClr val="333333"/>
+                </a:solidFill>
+              </a:defRPr>
+            </a:pPr>
+            <a:r>
+              <a:t>EtherCAT↔机械臂/力传感器</a:t>
+            </a:r>
+          </a:p>
+          <a:p>
+            <a:pPr>
+              <a:spcAft>
+                <a:spcPts val="300"/>
+              </a:spcAft>
+              <a:defRPr sz="1500">
+                <a:solidFill>
+                  <a:srgbClr val="333333"/>
+                </a:solidFill>
+              </a:defRPr>
+            </a:pPr>
+            <a:r>
+              <a:t>I2C↔触觉传感器/夹爪</a:t>
             </a:r>
           </a:p>
         </p:txBody>
@@ -5715,7 +4805,7 @@
         <p:spPr>
           <a:xfrm>
             <a:off x="0" y="0"/>
-            <a:ext cx="12191695" cy="548640"/>
+            <a:ext cx="12191695" cy="594360"/>
           </a:xfrm>
           <a:prstGeom prst="rect">
             <a:avLst/>
@@ -5758,7 +4848,7 @@
         <p:spPr>
           <a:xfrm>
             <a:off x="457200" y="45720"/>
-            <a:ext cx="10972800" cy="457200"/>
+            <a:ext cx="10972800" cy="502920"/>
           </a:xfrm>
           <a:prstGeom prst="rect">
             <a:avLst/>
@@ -5772,42 +4862,146 @@
           <a:lstStyle/>
           <a:p>
             <a:pPr>
-              <a:defRPr sz="2200" b="1">
+              <a:defRPr sz="2400" b="1">
                 <a:solidFill>
                   <a:srgbClr val="FFFFFF"/>
                 </a:solidFill>
               </a:defRPr>
             </a:pPr>
             <a:r>
-              <a:t>交付物文档 · docx_image1</a:t>
-            </a:r>
-          </a:p>
-        </p:txBody>
-      </p:sp>
-      <p:pic>
-        <p:nvPicPr>
-          <p:cNvPr id="4" name="Picture 3" descr="pptx_image11.png"/>
-          <p:cNvPicPr>
-            <a:picLocks noChangeAspect="1"/>
-          </p:cNvPicPr>
+              <a:t>ROS2架构(Domain23·21节点·51Topic)</a:t>
+            </a:r>
+          </a:p>
+        </p:txBody>
+      </p:sp>
+      <p:sp>
+        <p:nvSpPr>
+          <p:cNvPr id="4" name="TextBox 3"/>
+          <p:cNvSpPr txBox="1"/>
           <p:nvPr/>
-        </p:nvPicPr>
-        <p:blipFill>
-          <a:blip r:embed="rId2"/>
-          <a:stretch>
-            <a:fillRect/>
-          </a:stretch>
-        </p:blipFill>
-        <p:spPr>
-          <a:xfrm>
-            <a:off x="457200" y="731520"/>
+        </p:nvSpPr>
+        <p:spPr>
+          <a:xfrm>
+            <a:off x="457200" y="914400"/>
             <a:ext cx="10972800" cy="5669280"/>
           </a:xfrm>
           <a:prstGeom prst="rect">
             <a:avLst/>
           </a:prstGeom>
-        </p:spPr>
-      </p:pic>
+          <a:noFill/>
+        </p:spPr>
+        <p:txBody>
+          <a:bodyPr wrap="square">
+            <a:spAutoFit/>
+          </a:bodyPr>
+          <a:lstStyle/>
+          <a:p>
+            <a:pPr>
+              <a:spcAft>
+                <a:spcPts val="300"/>
+              </a:spcAft>
+              <a:defRPr sz="1100">
+                <a:solidFill>
+                  <a:srgbClr val="333333"/>
+                </a:solidFill>
+              </a:defRPr>
+            </a:pPr>
+            <a:r>
+              <a:t>/robot_driver—运动控制·/gripper_driver—夹爪</a:t>
+            </a:r>
+          </a:p>
+          <a:p>
+            <a:pPr>
+              <a:spcAft>
+                <a:spcPts val="300"/>
+              </a:spcAft>
+              <a:defRPr sz="1100">
+                <a:solidFill>
+                  <a:srgbClr val="333333"/>
+                </a:solidFill>
+              </a:defRPr>
+            </a:pPr>
+            <a:r>
+              <a:t>/realsense_source—RGB+深度·/tower_light—塔灯</a:t>
+            </a:r>
+          </a:p>
+          <a:p>
+            <a:pPr>
+              <a:spcAft>
+                <a:spcPts val="300"/>
+              </a:spcAft>
+              <a:defRPr sz="1100">
+                <a:solidFill>
+                  <a:srgbClr val="333333"/>
+                </a:solidFill>
+              </a:defRPr>
+            </a:pPr>
+            <a:r>
+              <a:t>/tactile_sensor—触觉·/force_torque_node—力</a:t>
+            </a:r>
+          </a:p>
+          <a:p>
+            <a:pPr>
+              <a:spcAft>
+                <a:spcPts val="300"/>
+              </a:spcAft>
+              <a:defRPr sz="1100">
+                <a:solidFill>
+                  <a:srgbClr val="333333"/>
+                </a:solidFill>
+              </a:defRPr>
+            </a:pPr>
+            <a:r>
+              <a:t>/physical_estop+/usb_estop—双路急停</a:t>
+            </a:r>
+          </a:p>
+          <a:p>
+            <a:pPr>
+              <a:spcAft>
+                <a:spcPts val="300"/>
+              </a:spcAft>
+              <a:defRPr sz="1100">
+                <a:solidFill>
+                  <a:srgbClr val="333333"/>
+                </a:solidFill>
+              </a:defRPr>
+            </a:pPr>
+            <a:r>
+              <a:t>/honeywell_scanner—扫码·/vision_tag—位姿</a:t>
+            </a:r>
+          </a:p>
+          <a:p>
+            <a:pPr>
+              <a:spcAft>
+                <a:spcPts val="300"/>
+              </a:spcAft>
+              <a:defRPr sz="1100">
+                <a:solidFill>
+                  <a:srgbClr val="333333"/>
+                </a:solidFill>
+              </a:defRPr>
+            </a:pPr>
+            <a:r>
+              <a:t>/obstacle_marker—障碍·/motion—状态机</a:t>
+            </a:r>
+          </a:p>
+          <a:p>
+            <a:pPr>
+              <a:spcAft>
+                <a:spcPts val="300"/>
+              </a:spcAft>
+              <a:defRPr sz="1100">
+                <a:solidFill>
+                  <a:srgbClr val="333333"/>
+                </a:solidFill>
+              </a:defRPr>
+            </a:pPr>
+            <a:r>
+              <a:t>/hmi+/external_comm—上位机通信</a:t>
+            </a:r>
+          </a:p>
+        </p:txBody>
+      </p:sp>
     </p:spTree>
   </p:cSld>
   <p:clrMapOvr>
@@ -5835,7 +5029,7 @@
         <p:spPr>
           <a:xfrm>
             <a:off x="0" y="0"/>
-            <a:ext cx="12191695" cy="548640"/>
+            <a:ext cx="12191695" cy="594360"/>
           </a:xfrm>
           <a:prstGeom prst="rect">
             <a:avLst/>
@@ -5878,7 +5072,7 @@
         <p:spPr>
           <a:xfrm>
             <a:off x="457200" y="45720"/>
-            <a:ext cx="10972800" cy="457200"/>
+            <a:ext cx="10972800" cy="502920"/>
           </a:xfrm>
           <a:prstGeom prst="rect">
             <a:avLst/>
@@ -5892,42 +5086,146 @@
           <a:lstStyle/>
           <a:p>
             <a:pPr>
-              <a:defRPr sz="2200" b="1">
+              <a:defRPr sz="2400" b="1">
                 <a:solidFill>
                   <a:srgbClr val="FFFFFF"/>
                 </a:solidFill>
               </a:defRPr>
             </a:pPr>
             <a:r>
-              <a:t>交付物文档 · pptx_image1</a:t>
-            </a:r>
-          </a:p>
-        </p:txBody>
-      </p:sp>
-      <p:pic>
-        <p:nvPicPr>
-          <p:cNvPr id="4" name="Picture 3" descr="pptx_image11.png"/>
-          <p:cNvPicPr>
-            <a:picLocks noChangeAspect="1"/>
-          </p:cNvPicPr>
+              <a:t>XSpace Studio(9大模块)</a:t>
+            </a:r>
+          </a:p>
+        </p:txBody>
+      </p:sp>
+      <p:sp>
+        <p:nvSpPr>
+          <p:cNvPr id="4" name="TextBox 3"/>
+          <p:cNvSpPr txBox="1"/>
           <p:nvPr/>
-        </p:nvPicPr>
-        <p:blipFill>
-          <a:blip r:embed="rId2"/>
-          <a:stretch>
-            <a:fillRect/>
-          </a:stretch>
-        </p:blipFill>
-        <p:spPr>
-          <a:xfrm>
-            <a:off x="457200" y="731520"/>
+        </p:nvSpPr>
+        <p:spPr>
+          <a:xfrm>
+            <a:off x="457200" y="914400"/>
             <a:ext cx="10972800" cy="5669280"/>
           </a:xfrm>
           <a:prstGeom prst="rect">
             <a:avLst/>
           </a:prstGeom>
-        </p:spPr>
-      </p:pic>
+          <a:noFill/>
+        </p:spPr>
+        <p:txBody>
+          <a:bodyPr wrap="square">
+            <a:spAutoFit/>
+          </a:bodyPr>
+          <a:lstStyle/>
+          <a:p>
+            <a:pPr>
+              <a:spcAft>
+                <a:spcPts val="300"/>
+              </a:spcAft>
+              <a:defRPr sz="1400">
+                <a:solidFill>
+                  <a:srgbClr val="333333"/>
+                </a:solidFill>
+              </a:defRPr>
+            </a:pPr>
+            <a:r>
+              <a:t>🏠首页 📦数据集 🏋️训练 ✅评估</a:t>
+            </a:r>
+          </a:p>
+          <a:p>
+            <a:pPr>
+              <a:spcAft>
+                <a:spcPts val="300"/>
+              </a:spcAft>
+              <a:defRPr sz="1400">
+                <a:solidFill>
+                  <a:srgbClr val="333333"/>
+                </a:solidFill>
+              </a:defRPr>
+            </a:pPr>
+            <a:r>
+              <a:t>🔧硬件工具箱(12路CANoe总线)</a:t>
+            </a:r>
+          </a:p>
+          <a:p>
+            <a:pPr>
+              <a:spcAft>
+                <a:spcPts val="300"/>
+              </a:spcAft>
+              <a:defRPr sz="1400">
+                <a:solidFill>
+                  <a:srgbClr val="333333"/>
+                </a:solidFill>
+              </a:defRPr>
+            </a:pPr>
+            <a:r>
+              <a:t>⚙️配置中心(SmolVLA-LEW参数编辑)</a:t>
+            </a:r>
+          </a:p>
+          <a:p>
+            <a:pPr>
+              <a:spcAft>
+                <a:spcPts val="300"/>
+              </a:spcAft>
+              <a:defRPr sz="1400">
+                <a:solidFill>
+                  <a:srgbClr val="333333"/>
+                </a:solidFill>
+              </a:defRPr>
+            </a:pPr>
+            <a:r>
+              <a:t>📈实时监控(6信号源+Rerun3D)</a:t>
+            </a:r>
+          </a:p>
+          <a:p>
+            <a:pPr>
+              <a:spcAft>
+                <a:spcPts val="300"/>
+              </a:spcAft>
+              <a:defRPr sz="1400">
+                <a:solidFill>
+                  <a:srgbClr val="333333"/>
+                </a:solidFill>
+              </a:defRPr>
+            </a:pPr>
+            <a:r>
+              <a:t>🤖插拔场景(L2/L3/L4+功能积木)</a:t>
+            </a:r>
+          </a:p>
+          <a:p>
+            <a:pPr>
+              <a:spcAft>
+                <a:spcPts val="300"/>
+              </a:spcAft>
+              <a:defRPr sz="1400">
+                <a:solidFill>
+                  <a:srgbClr val="333333"/>
+                </a:solidFill>
+              </a:defRPr>
+            </a:pPr>
+            <a:r>
+              <a:t>🔄版本同步(LeRobot上游管理)</a:t>
+            </a:r>
+          </a:p>
+          <a:p>
+            <a:pPr>
+              <a:spcAft>
+                <a:spcPts val="300"/>
+              </a:spcAft>
+              <a:defRPr sz="1400">
+                <a:solidFill>
+                  <a:srgbClr val="333333"/>
+                </a:solidFill>
+              </a:defRPr>
+            </a:pPr>
+            <a:r>
+              <a:t>📖帮助文档(含培训手册)</a:t>
+            </a:r>
+          </a:p>
+        </p:txBody>
+      </p:sp>
     </p:spTree>
   </p:cSld>
   <p:clrMapOvr>
@@ -5955,7 +5253,7 @@
         <p:spPr>
           <a:xfrm>
             <a:off x="0" y="0"/>
-            <a:ext cx="12191695" cy="640080"/>
+            <a:ext cx="12191695" cy="594360"/>
           </a:xfrm>
           <a:prstGeom prst="rect">
             <a:avLst/>
@@ -5998,7 +5296,7 @@
         <p:spPr>
           <a:xfrm>
             <a:off x="457200" y="45720"/>
-            <a:ext cx="10972800" cy="548640"/>
+            <a:ext cx="10972800" cy="502920"/>
           </a:xfrm>
           <a:prstGeom prst="rect">
             <a:avLst/>
@@ -6012,14 +5310,14 @@
           <a:lstStyle/>
           <a:p>
             <a:pPr>
-              <a:defRPr sz="2600" b="1">
+              <a:defRPr sz="2400" b="1">
                 <a:solidFill>
                   <a:srgbClr val="FFFFFF"/>
                 </a:solidFill>
               </a:defRPr>
             </a:pPr>
             <a:r>
-              <a:t>XSpace Studio · 操控平台</a:t>
+              <a:t>L2/L3/L4功能积木</a:t>
             </a:r>
           </a:p>
         </p:txBody>
@@ -6032,8 +5330,8 @@
         </p:nvSpPr>
         <p:spPr>
           <a:xfrm>
-            <a:off x="457200" y="1005840"/>
-            <a:ext cx="10972800" cy="5486400"/>
+            <a:off x="457200" y="914400"/>
+            <a:ext cx="10972800" cy="5669280"/>
           </a:xfrm>
           <a:prstGeom prst="rect">
             <a:avLst/>
@@ -6048,187 +5346,46 @@
           <a:p>
             <a:pPr>
               <a:spcAft>
-                <a:spcPts val="400"/>
-              </a:spcAft>
-              <a:defRPr sz="1500">
-                <a:solidFill>
-                  <a:srgbClr val="333333"/>
-                </a:solidFill>
-              </a:defRPr>
-            </a:pPr>
-            <a:r>
-              <a:t>Windows PC 上的一站式操作界面 (PyQt5 暗色主题)</a:t>
-            </a:r>
-          </a:p>
-          <a:p>
-            <a:pPr>
-              <a:spcAft>
-                <a:spcPts val="400"/>
-              </a:spcAft>
-              <a:defRPr sz="1500">
-                <a:solidFill>
-                  <a:srgbClr val="333333"/>
-                </a:solidFill>
-              </a:defRPr>
-            </a:pPr>
-          </a:p>
-          <a:p>
-            <a:pPr>
-              <a:spcAft>
-                <a:spcPts val="400"/>
-              </a:spcAft>
-              <a:defRPr sz="1500">
-                <a:solidFill>
-                  <a:srgbClr val="333333"/>
-                </a:solidFill>
-              </a:defRPr>
-            </a:pPr>
-            <a:r>
-              <a:t>🔧 硬件工具箱     12路硬件总线 (CANoe风格) · 单路独立控制</a:t>
-            </a:r>
-          </a:p>
-          <a:p>
-            <a:pPr>
-              <a:spcAft>
-                <a:spcPts val="400"/>
-              </a:spcAft>
-              <a:defRPr sz="1500">
-                <a:solidFill>
-                  <a:srgbClr val="333333"/>
-                </a:solidFill>
-              </a:defRPr>
-            </a:pPr>
-            <a:r>
-              <a:t>                  塔灯🟢🟡🔴⚫ · 夹爪🖐️开✊关 · 机械臂📡🛑</a:t>
-            </a:r>
-          </a:p>
-          <a:p>
-            <a:pPr>
-              <a:spcAft>
-                <a:spcPts val="400"/>
-              </a:spcAft>
-              <a:defRPr sz="1500">
-                <a:solidFill>
-                  <a:srgbClr val="333333"/>
-                </a:solidFill>
-              </a:defRPr>
-            </a:pPr>
-            <a:r>
-              <a:t>                  RealSense 📸拍照 · 触觉📡读取 · SSH复用0.3s</a:t>
-            </a:r>
-          </a:p>
-          <a:p>
-            <a:pPr>
-              <a:spcAft>
-                <a:spcPts val="400"/>
-              </a:spcAft>
-              <a:defRPr sz="1500">
-                <a:solidFill>
-                  <a:srgbClr val="333333"/>
-                </a:solidFill>
-              </a:defRPr>
-            </a:pPr>
-          </a:p>
-          <a:p>
-            <a:pPr>
-              <a:spcAft>
-                <a:spcPts val="400"/>
-              </a:spcAft>
-              <a:defRPr sz="1500">
-                <a:solidFill>
-                  <a:srgbClr val="333333"/>
-                </a:solidFill>
-              </a:defRPr>
-            </a:pPr>
-            <a:r>
-              <a:t>📈 实时监控       5种信号源(回放/仿真/演示/实时/离线)</a:t>
-            </a:r>
-          </a:p>
-          <a:p>
-            <a:pPr>
-              <a:spcAft>
-                <a:spcPts val="400"/>
-              </a:spcAft>
-              <a:defRPr sz="1500">
-                <a:solidFill>
-                  <a:srgbClr val="333333"/>
-                </a:solidFill>
-              </a:defRPr>
-            </a:pPr>
-            <a:r>
-              <a:t>                  Rerun 3D可视化 · Topic/Node面板 · 信号追踪</a:t>
-            </a:r>
-          </a:p>
-          <a:p>
-            <a:pPr>
-              <a:spcAft>
-                <a:spcPts val="400"/>
-              </a:spcAft>
-              <a:defRPr sz="1500">
-                <a:solidFill>
-                  <a:srgbClr val="333333"/>
-                </a:solidFill>
-              </a:defRPr>
-            </a:pPr>
-          </a:p>
-          <a:p>
-            <a:pPr>
-              <a:spcAft>
-                <a:spcPts val="400"/>
-              </a:spcAft>
-              <a:defRPr sz="1500">
-                <a:solidFill>
-                  <a:srgbClr val="333333"/>
-                </a:solidFill>
-              </a:defRPr>
-            </a:pPr>
-            <a:r>
-              <a:t>🏋️ 训练控制台     SmolVLA DiffusionPolicy 端到端训练</a:t>
-            </a:r>
-          </a:p>
-          <a:p>
-            <a:pPr>
-              <a:spcAft>
-                <a:spcPts val="400"/>
-              </a:spcAft>
-              <a:defRPr sz="1500">
-                <a:solidFill>
-                  <a:srgbClr val="333333"/>
-                </a:solidFill>
-              </a:defRPr>
-            </a:pPr>
-            <a:r>
-              <a:t>✅ 评估分析       训练损失曲线 · 多记录对比 · 模型管理</a:t>
-            </a:r>
-          </a:p>
-          <a:p>
-            <a:pPr>
-              <a:spcAft>
-                <a:spcPts val="400"/>
-              </a:spcAft>
-              <a:defRPr sz="1500">
-                <a:solidFill>
-                  <a:srgbClr val="333333"/>
-                </a:solidFill>
-              </a:defRPr>
-            </a:pPr>
-            <a:r>
-              <a:t>🤖 插拔场景       L2/L3/L4 三级场景参考</a:t>
-            </a:r>
-          </a:p>
-          <a:p>
-            <a:pPr>
-              <a:spcAft>
-                <a:spcPts val="400"/>
-              </a:spcAft>
-              <a:defRPr sz="1500">
-                <a:solidFill>
-                  <a:srgbClr val="333333"/>
-                </a:solidFill>
-              </a:defRPr>
-            </a:pPr>
-            <a:r>
-              <a:t>📖 帮助文档       操作手册 · 培训材料 · 开发宝典</a:t>
+                <a:spcPts val="300"/>
+              </a:spcAft>
+              <a:defRPr sz="1300">
+                <a:solidFill>
+                  <a:srgbClr val="333333"/>
+                </a:solidFill>
+              </a:defRPr>
+            </a:pPr>
+            <a:r>
+              <a:t>L2(≥99.2%):人工编排·原子功能·动作执行·力控·AOI·下料</a:t>
+            </a:r>
+          </a:p>
+          <a:p>
+            <a:pPr>
+              <a:spcAft>
+                <a:spcPts val="300"/>
+              </a:spcAft>
+              <a:defRPr sz="1300">
+                <a:solidFill>
+                  <a:srgbClr val="333333"/>
+                </a:solidFill>
+              </a:defRPr>
+            </a:pPr>
+            <a:r>
+              <a:t>L3(≥99.5%): +多模块识别·自主闭环·换线配方·异常恢复</a:t>
+            </a:r>
+          </a:p>
+          <a:p>
+            <a:pPr>
+              <a:spcAft>
+                <a:spcPts val="300"/>
+              </a:spcAft>
+              <a:defRPr sz="1300">
+                <a:solidFill>
+                  <a:srgbClr val="333333"/>
+                </a:solidFill>
+              </a:defRPr>
+            </a:pPr>
+            <a:r>
+              <a:t>L4(≥99.9%): +力控预判·触觉闭环·光幕·自诊断·AI预测</a:t>
             </a:r>
           </a:p>
         </p:txBody>
@@ -6260,7 +5417,7 @@
         <p:spPr>
           <a:xfrm>
             <a:off x="0" y="0"/>
-            <a:ext cx="12191695" cy="640080"/>
+            <a:ext cx="12191695" cy="594360"/>
           </a:xfrm>
           <a:prstGeom prst="rect">
             <a:avLst/>
@@ -6303,7 +5460,7 @@
         <p:spPr>
           <a:xfrm>
             <a:off x="457200" y="45720"/>
-            <a:ext cx="10972800" cy="548640"/>
+            <a:ext cx="10972800" cy="502920"/>
           </a:xfrm>
           <a:prstGeom prst="rect">
             <a:avLst/>
@@ -6317,14 +5474,14 @@
           <a:lstStyle/>
           <a:p>
             <a:pPr>
-              <a:defRPr sz="2600" b="1">
+              <a:defRPr sz="2400" b="1">
                 <a:solidFill>
                   <a:srgbClr val="FFFFFF"/>
                 </a:solidFill>
               </a:defRPr>
             </a:pPr>
             <a:r>
-              <a:t>投资回报 · 12个月回本</a:t>
+              <a:t>五层安全保护</a:t>
             </a:r>
           </a:p>
         </p:txBody>
@@ -6337,8 +5494,8 @@
         </p:nvSpPr>
         <p:spPr>
           <a:xfrm>
-            <a:off x="457200" y="1005840"/>
-            <a:ext cx="10972800" cy="5486400"/>
+            <a:off x="457200" y="914400"/>
+            <a:ext cx="10972800" cy="5669280"/>
           </a:xfrm>
           <a:prstGeom prst="rect">
             <a:avLst/>
@@ -6353,163 +5510,76 @@
           <a:p>
             <a:pPr>
               <a:spcAft>
-                <a:spcPts val="400"/>
-              </a:spcAft>
-              <a:defRPr sz="1500">
-                <a:solidFill>
-                  <a:srgbClr val="333333"/>
-                </a:solidFill>
-              </a:defRPr>
-            </a:pPr>
-            <a:r>
-              <a:t>对比项             熟练工人(3班倒)     Z700 F 基线版</a:t>
-            </a:r>
-          </a:p>
-          <a:p>
-            <a:pPr>
-              <a:spcAft>
-                <a:spcPts val="400"/>
-              </a:spcAft>
-              <a:defRPr sz="1500">
-                <a:solidFill>
-                  <a:srgbClr val="333333"/>
-                </a:solidFill>
-              </a:defRPr>
-            </a:pPr>
-            <a:r>
-              <a:t>────────────────────────────────────────────────</a:t>
-            </a:r>
-          </a:p>
-          <a:p>
-            <a:pPr>
-              <a:spcAft>
-                <a:spcPts val="400"/>
-              </a:spcAft>
-              <a:defRPr sz="1500">
-                <a:solidFill>
-                  <a:srgbClr val="333333"/>
-                </a:solidFill>
-              </a:defRPr>
-            </a:pPr>
-            <a:r>
-              <a:t>年人力成本          108万/年            0（仅电费）</a:t>
-            </a:r>
-          </a:p>
-          <a:p>
-            <a:pPr>
-              <a:spcAft>
-                <a:spcPts val="400"/>
-              </a:spcAft>
-              <a:defRPr sz="1500">
-                <a:solidFill>
-                  <a:srgbClr val="333333"/>
-                </a:solidFill>
-              </a:defRPr>
-            </a:pPr>
-            <a:r>
-              <a:t>关键工序良率        95~97%              ≥99.2%</a:t>
-            </a:r>
-          </a:p>
-          <a:p>
-            <a:pPr>
-              <a:spcAft>
-                <a:spcPts val="400"/>
-              </a:spcAft>
-              <a:defRPr sz="1500">
-                <a:solidFill>
-                  <a:srgbClr val="333333"/>
-                </a:solidFill>
-              </a:defRPr>
-            </a:pPr>
-            <a:r>
-              <a:t>单模块节拍          45~60秒             38秒（稳定）</a:t>
-            </a:r>
-          </a:p>
-          <a:p>
-            <a:pPr>
-              <a:spcAft>
-                <a:spcPts val="400"/>
-              </a:spcAft>
-              <a:defRPr sz="1500">
-                <a:solidFill>
-                  <a:srgbClr val="333333"/>
-                </a:solidFill>
-              </a:defRPr>
-            </a:pPr>
-            <a:r>
-              <a:t>工作时间            8h×3班=24h           24h×7天</a:t>
-            </a:r>
-          </a:p>
-          <a:p>
-            <a:pPr>
-              <a:spcAft>
-                <a:spcPts val="400"/>
-              </a:spcAft>
-              <a:defRPr sz="1500">
-                <a:solidFill>
-                  <a:srgbClr val="333333"/>
-                </a:solidFill>
-              </a:defRPr>
-            </a:pPr>
-            <a:r>
-              <a:t>培训成本            3个月/新人          1天培训</a:t>
-            </a:r>
-          </a:p>
-          <a:p>
-            <a:pPr>
-              <a:spcAft>
-                <a:spcPts val="400"/>
-              </a:spcAft>
-              <a:defRPr sz="1500">
-                <a:solidFill>
-                  <a:srgbClr val="333333"/>
-                </a:solidFill>
-              </a:defRPr>
-            </a:pPr>
-            <a:r>
-              <a:t>────────────────────────────────────────────────</a:t>
-            </a:r>
-          </a:p>
-          <a:p>
-            <a:pPr>
-              <a:spcAft>
-                <a:spcPts val="400"/>
-              </a:spcAft>
-              <a:defRPr sz="1500">
-                <a:solidFill>
-                  <a:srgbClr val="333333"/>
-                </a:solidFill>
-              </a:defRPr>
-            </a:pPr>
-            <a:r>
-              <a:t>年综合成本          ≈120万              ≈25万（折旧）</a:t>
-            </a:r>
-          </a:p>
-          <a:p>
-            <a:pPr>
-              <a:spcAft>
-                <a:spcPts val="400"/>
-              </a:spcAft>
-              <a:defRPr sz="1500">
-                <a:solidFill>
-                  <a:srgbClr val="333333"/>
-                </a:solidFill>
-              </a:defRPr>
-            </a:pPr>
-          </a:p>
-          <a:p>
-            <a:pPr>
-              <a:spcAft>
-                <a:spcPts val="400"/>
-              </a:spcAft>
-              <a:defRPr sz="1500">
-                <a:solidFill>
-                  <a:srgbClr val="333333"/>
-                </a:solidFill>
-              </a:defRPr>
-            </a:pPr>
-            <a:r>
-              <a:t>💰 投资回报周期: 约 12 个月  |  之后每年净省 95 万+</a:t>
+                <a:spcPts val="300"/>
+              </a:spcAft>
+              <a:defRPr sz="1600">
+                <a:solidFill>
+                  <a:srgbClr val="333333"/>
+                </a:solidFill>
+              </a:defRPr>
+            </a:pPr>
+            <a:r>
+              <a:t>L1力控预判(&gt;10kHz→0.05s停机)</a:t>
+            </a:r>
+          </a:p>
+          <a:p>
+            <a:pPr>
+              <a:spcAft>
+                <a:spcPts val="300"/>
+              </a:spcAft>
+              <a:defRPr sz="1600">
+                <a:solidFill>
+                  <a:srgbClr val="333333"/>
+                </a:solidFill>
+              </a:defRPr>
+            </a:pPr>
+            <a:r>
+              <a:t>L2触觉闭环(&gt;2N自动释放)</a:t>
+            </a:r>
+          </a:p>
+          <a:p>
+            <a:pPr>
+              <a:spcAft>
+                <a:spcPts val="300"/>
+              </a:spcAft>
+              <a:defRPr sz="1600">
+                <a:solidFill>
+                  <a:srgbClr val="333333"/>
+                </a:solidFill>
+              </a:defRPr>
+            </a:pPr>
+            <a:r>
+              <a:t>L3光幕联动(人员→降速/停机)</a:t>
+            </a:r>
+          </a:p>
+          <a:p>
+            <a:pPr>
+              <a:spcAft>
+                <a:spcPts val="300"/>
+              </a:spcAft>
+              <a:defRPr sz="1600">
+                <a:solidFill>
+                  <a:srgbClr val="333333"/>
+                </a:solidFill>
+              </a:defRPr>
+            </a:pPr>
+            <a:r>
+              <a:t>L4双路急停(物理+USB冗余)</a:t>
+            </a:r>
+          </a:p>
+          <a:p>
+            <a:pPr>
+              <a:spcAft>
+                <a:spcPts val="300"/>
+              </a:spcAft>
+              <a:defRPr sz="1600">
+                <a:solidFill>
+                  <a:srgbClr val="333333"/>
+                </a:solidFill>
+              </a:defRPr>
+            </a:pPr>
+            <a:r>
+              <a:t>L5塔灯指示(🟢正常🟡处理🔴急停)</a:t>
             </a:r>
           </a:p>
         </p:txBody>
